--- a/令和9年度教育課程編成/令和9年度_上席相談資料.pptx
+++ b/令和9年度教育課程編成/令和9年度_上席相談資料.pptx
@@ -3142,8 +3142,8 @@
         </p:nvSpPr>
         <p:spPr>
           <a:xfrm>
-            <a:off x="320040" y="54864"/>
-            <a:ext cx="11521440" cy="731520"/>
+            <a:off x="320040" y="45720"/>
+            <a:ext cx="11521440" cy="749808"/>
           </a:xfrm>
           <a:prstGeom prst="rect">
             <a:avLst/>
@@ -3151,19 +3151,19 @@
           <a:noFill/>
         </p:spPr>
         <p:txBody>
-          <a:bodyPr wrap="square" anchor="ctr" lIns="63500" rIns="63500" tIns="25400" bIns="25400">
+          <a:bodyPr wrap="square" anchor="ctr" lIns="76200" rIns="76200" tIns="25400" bIns="25400">
             <a:spAutoFit/>
           </a:bodyPr>
           <a:lstStyle/>
           <a:p>
             <a:r>
-              <a:rPr sz="2500" b="1">
+              <a:rPr sz="2400" b="1">
                 <a:solidFill>
                   <a:srgbClr val="FFFFFF"/>
                 </a:solidFill>
-                <a:latin typeface="游ゴシック"/>
-                <a:ea typeface="游ゴシック"/>
-                <a:cs typeface="游ゴシック"/>
+                <a:latin typeface="Meiryo"/>
+                <a:ea typeface="メイリオ"/>
+                <a:cs typeface="メイリオ"/>
               </a:rPr>
               <a:t>令和９年度 教育課程編成に向けて（上席相談）</a:t>
             </a:r>
@@ -3179,7 +3179,7 @@
         <p:spPr>
           <a:xfrm>
             <a:off x="0" y="841248"/>
-            <a:ext cx="12191695" cy="420624"/>
+            <a:ext cx="12191695" cy="438912"/>
           </a:xfrm>
           <a:prstGeom prst="rect">
             <a:avLst/>
@@ -3223,7 +3223,7 @@
         <p:spPr>
           <a:xfrm>
             <a:off x="320040" y="850392"/>
-            <a:ext cx="11521440" cy="402336"/>
+            <a:ext cx="11521440" cy="420624"/>
           </a:xfrm>
           <a:prstGeom prst="rect">
             <a:avLst/>
@@ -3231,19 +3231,19 @@
           <a:noFill/>
         </p:spPr>
         <p:txBody>
-          <a:bodyPr wrap="square" anchor="ctr" lIns="63500" rIns="63500" tIns="25400" bIns="25400">
+          <a:bodyPr wrap="square" anchor="ctr" lIns="76200" rIns="76200" tIns="25400" bIns="25400">
             <a:spAutoFit/>
           </a:bodyPr>
           <a:lstStyle/>
           <a:p>
             <a:r>
-              <a:rPr sz="1350" b="1">
+              <a:rPr sz="1600" b="1">
                 <a:solidFill>
                   <a:srgbClr val="FFFFFF"/>
                 </a:solidFill>
-                <a:latin typeface="游ゴシック"/>
-                <a:ea typeface="游ゴシック"/>
-                <a:cs typeface="游ゴシック"/>
+                <a:latin typeface="Meiryo"/>
+                <a:ea typeface="メイリオ"/>
+                <a:cs typeface="メイリオ"/>
               </a:rPr>
               <a:t>令和８年度の作成過程と 令和７年度からの主な変更点（根拠明示）</a:t>
             </a:r>
@@ -3258,8 +3258,8 @@
         </p:nvSpPr>
         <p:spPr>
           <a:xfrm>
-            <a:off x="320040" y="1417320"/>
-            <a:ext cx="11548872" cy="384048"/>
+            <a:off x="320040" y="1389888"/>
+            <a:ext cx="11548872" cy="420624"/>
           </a:xfrm>
           <a:prstGeom prst="rect">
             <a:avLst/>
@@ -3302,8 +3302,8 @@
         </p:nvSpPr>
         <p:spPr>
           <a:xfrm>
-            <a:off x="374904" y="1417320"/>
-            <a:ext cx="11457432" cy="384048"/>
+            <a:off x="393192" y="1389888"/>
+            <a:ext cx="11439144" cy="420624"/>
           </a:xfrm>
           <a:prstGeom prst="rect">
             <a:avLst/>
@@ -3311,19 +3311,19 @@
           <a:noFill/>
         </p:spPr>
         <p:txBody>
-          <a:bodyPr wrap="square" anchor="ctr" lIns="63500" rIns="63500" tIns="25400" bIns="25400">
+          <a:bodyPr wrap="square" anchor="ctr" lIns="76200" rIns="76200" tIns="25400" bIns="25400">
             <a:spAutoFit/>
           </a:bodyPr>
           <a:lstStyle/>
           <a:p>
             <a:r>
-              <a:rPr sz="1400" b="1">
+              <a:rPr sz="1800" b="1">
                 <a:solidFill>
                   <a:srgbClr val="1E4620"/>
                 </a:solidFill>
-                <a:latin typeface="游ゴシック"/>
-                <a:ea typeface="游ゴシック"/>
-                <a:cs typeface="游ゴシック"/>
+                <a:latin typeface="Meiryo"/>
+                <a:ea typeface="メイリオ"/>
+                <a:cs typeface="メイリオ"/>
               </a:rPr>
               <a:t>■ 相談の狙い</a:t>
             </a:r>
@@ -3338,8 +3338,8 @@
         </p:nvSpPr>
         <p:spPr>
           <a:xfrm>
-            <a:off x="457200" y="1847088"/>
-            <a:ext cx="11338560" cy="868680"/>
+            <a:off x="457200" y="1865376"/>
+            <a:ext cx="11338560" cy="777240"/>
           </a:xfrm>
           <a:prstGeom prst="rect">
             <a:avLst/>
@@ -3347,63 +3347,63 @@
           <a:noFill/>
         </p:spPr>
         <p:txBody>
-          <a:bodyPr wrap="square" anchor="t" lIns="63500" rIns="63500" tIns="25400" bIns="25400">
+          <a:bodyPr wrap="square" anchor="t" lIns="76200" rIns="76200" tIns="25400" bIns="25400">
             <a:spAutoFit/>
           </a:bodyPr>
           <a:lstStyle/>
           <a:p>
             <a:r>
-              <a:rPr sz="1300" b="0">
+              <a:rPr sz="1600" b="0">
                 <a:solidFill>
                   <a:srgbClr val="222222"/>
                 </a:solidFill>
-                <a:latin typeface="游ゴシック"/>
-                <a:ea typeface="游ゴシック"/>
-                <a:cs typeface="游ゴシック"/>
+                <a:latin typeface="Meiryo"/>
+                <a:ea typeface="メイリオ"/>
+                <a:cs typeface="メイリオ"/>
               </a:rPr>
-              <a:t>令和９年度の素案づくりに着手するにあたり、</a:t>
-            </a:r>
-            <a:r>
-              <a:rPr sz="1300" b="1">
+              <a:t>令和９年度の素案づくりに向け、</a:t>
+            </a:r>
+            <a:r>
+              <a:rPr sz="1600" b="1">
                 <a:solidFill>
                   <a:srgbClr val="2E7D46"/>
                 </a:solidFill>
-                <a:latin typeface="游ゴシック"/>
-                <a:ea typeface="游ゴシック"/>
-                <a:cs typeface="游ゴシック"/>
+                <a:latin typeface="Meiryo"/>
+                <a:ea typeface="メイリオ"/>
+                <a:cs typeface="メイリオ"/>
               </a:rPr>
               <a:t>令和８年度の作成過程・変更点・根拠</a:t>
             </a:r>
             <a:r>
-              <a:rPr sz="1300" b="0">
+              <a:rPr sz="1600" b="0">
                 <a:solidFill>
                   <a:srgbClr val="222222"/>
                 </a:solidFill>
-                <a:latin typeface="游ゴシック"/>
-                <a:ea typeface="游ゴシック"/>
-                <a:cs typeface="游ゴシック"/>
+                <a:latin typeface="Meiryo"/>
+                <a:ea typeface="メイリオ"/>
+                <a:cs typeface="メイリオ"/>
               </a:rPr>
               <a:t>を上席と共有し、</a:t>
             </a:r>
             <a:r>
-              <a:rPr sz="1300" b="1">
+              <a:rPr sz="1600" b="1">
                 <a:solidFill>
                   <a:srgbClr val="2E7D46"/>
                 </a:solidFill>
-                <a:latin typeface="游ゴシック"/>
-                <a:ea typeface="游ゴシック"/>
-                <a:cs typeface="游ゴシック"/>
+                <a:latin typeface="Meiryo"/>
+                <a:ea typeface="メイリオ"/>
+                <a:cs typeface="メイリオ"/>
               </a:rPr>
               <a:t>令和９年度も同じ論理（上位計画からの一貫した根拠づけ＋変更点の見える化）で進めてよいか</a:t>
             </a:r>
             <a:r>
-              <a:rPr sz="1300" b="0">
+              <a:rPr sz="1600" b="0">
                 <a:solidFill>
                   <a:srgbClr val="222222"/>
                 </a:solidFill>
-                <a:latin typeface="游ゴシック"/>
-                <a:ea typeface="游ゴシック"/>
-                <a:cs typeface="游ゴシック"/>
+                <a:latin typeface="Meiryo"/>
+                <a:ea typeface="メイリオ"/>
+                <a:cs typeface="メイリオ"/>
               </a:rPr>
               <a:t>を相談したい。</a:t>
             </a:r>
@@ -3419,7 +3419,7 @@
         <p:spPr>
           <a:xfrm>
             <a:off x="320040" y="2487168"/>
-            <a:ext cx="11548872" cy="384048"/>
+            <a:ext cx="11548872" cy="420624"/>
           </a:xfrm>
           <a:prstGeom prst="rect">
             <a:avLst/>
@@ -3462,8 +3462,8 @@
         </p:nvSpPr>
         <p:spPr>
           <a:xfrm>
-            <a:off x="374904" y="2487168"/>
-            <a:ext cx="11457432" cy="384048"/>
+            <a:off x="393192" y="2487168"/>
+            <a:ext cx="11439144" cy="420624"/>
           </a:xfrm>
           <a:prstGeom prst="rect">
             <a:avLst/>
@@ -3471,19 +3471,19 @@
           <a:noFill/>
         </p:spPr>
         <p:txBody>
-          <a:bodyPr wrap="square" anchor="ctr" lIns="63500" rIns="63500" tIns="25400" bIns="25400">
+          <a:bodyPr wrap="square" anchor="ctr" lIns="76200" rIns="76200" tIns="25400" bIns="25400">
             <a:spAutoFit/>
           </a:bodyPr>
           <a:lstStyle/>
           <a:p>
             <a:r>
-              <a:rPr sz="1400" b="1">
+              <a:rPr sz="1800" b="1">
                 <a:solidFill>
                   <a:srgbClr val="1E4620"/>
                 </a:solidFill>
-                <a:latin typeface="游ゴシック"/>
-                <a:ea typeface="游ゴシック"/>
-                <a:cs typeface="游ゴシック"/>
+                <a:latin typeface="Meiryo"/>
+                <a:ea typeface="メイリオ"/>
+                <a:cs typeface="メイリオ"/>
               </a:rPr>
               <a:t>■ 令和８年度の文書体系（上位計画から教育課程まで根拠が一直線）</a:t>
             </a:r>
@@ -3498,8 +3498,8 @@
         </p:nvSpPr>
         <p:spPr>
           <a:xfrm>
-            <a:off x="457200" y="2971800"/>
-            <a:ext cx="2103120" cy="786384"/>
+            <a:off x="411480" y="2999232"/>
+            <a:ext cx="2103120" cy="868680"/>
           </a:xfrm>
           <a:prstGeom prst="roundRect">
             <a:avLst>
@@ -3546,8 +3546,8 @@
         </p:nvSpPr>
         <p:spPr>
           <a:xfrm>
-            <a:off x="484632" y="2971800"/>
-            <a:ext cx="2048255" cy="786384"/>
+            <a:off x="448056" y="2999232"/>
+            <a:ext cx="2029967" cy="868680"/>
           </a:xfrm>
           <a:prstGeom prst="rect">
             <a:avLst/>
@@ -3555,20 +3555,20 @@
           <a:noFill/>
         </p:spPr>
         <p:txBody>
-          <a:bodyPr wrap="square" anchor="ctr" lIns="63500" rIns="63500" tIns="25400" bIns="25400">
+          <a:bodyPr wrap="square" anchor="ctr" lIns="76200" rIns="76200" tIns="25400" bIns="25400">
             <a:spAutoFit/>
           </a:bodyPr>
           <a:lstStyle/>
           <a:p>
             <a:pPr algn="ctr"/>
             <a:r>
-              <a:rPr sz="1100" b="1">
+              <a:rPr sz="1500" b="1">
                 <a:solidFill>
                   <a:srgbClr val="1E4620"/>
                 </a:solidFill>
-                <a:latin typeface="游ゴシック"/>
-                <a:ea typeface="游ゴシック"/>
-                <a:cs typeface="游ゴシック"/>
+                <a:latin typeface="Meiryo"/>
+                <a:ea typeface="メイリオ"/>
+                <a:cs typeface="メイリオ"/>
               </a:rPr>
               <a:t>練馬区教育・子育て大綱</a:t>
             </a:r>
@@ -3576,15 +3576,15 @@
           <a:p>
             <a:pPr algn="ctr"/>
             <a:r>
-              <a:rPr sz="850" b="0">
+              <a:rPr sz="1200" b="0">
                 <a:solidFill>
                   <a:srgbClr val="555555"/>
                 </a:solidFill>
-                <a:latin typeface="游ゴシック"/>
-                <a:ea typeface="游ゴシック"/>
-                <a:cs typeface="游ゴシック"/>
+                <a:latin typeface="Meiryo"/>
+                <a:ea typeface="メイリオ"/>
+                <a:cs typeface="メイリオ"/>
               </a:rPr>
-              <a:t>（令和３年３月改定）</a:t>
+              <a:t>令和３年３月改定</a:t>
             </a:r>
           </a:p>
         </p:txBody>
@@ -3597,8 +3597,8 @@
         </p:nvSpPr>
         <p:spPr>
           <a:xfrm>
-            <a:off x="2542032" y="2971800"/>
-            <a:ext cx="274320" cy="786384"/>
+            <a:off x="2487168" y="2999232"/>
+            <a:ext cx="288036" cy="868680"/>
           </a:xfrm>
           <a:prstGeom prst="rect">
             <a:avLst/>
@@ -3606,20 +3606,20 @@
           <a:noFill/>
         </p:spPr>
         <p:txBody>
-          <a:bodyPr wrap="square" anchor="ctr" lIns="63500" rIns="63500" tIns="25400" bIns="25400">
+          <a:bodyPr wrap="square" anchor="ctr" lIns="76200" rIns="76200" tIns="25400" bIns="25400">
             <a:spAutoFit/>
           </a:bodyPr>
           <a:lstStyle/>
           <a:p>
             <a:pPr algn="ctr"/>
             <a:r>
-              <a:rPr sz="1200" b="1">
+              <a:rPr sz="1500" b="1">
                 <a:solidFill>
                   <a:srgbClr val="70AD47"/>
                 </a:solidFill>
-                <a:latin typeface="游ゴシック"/>
-                <a:ea typeface="游ゴシック"/>
-                <a:cs typeface="游ゴシック"/>
+                <a:latin typeface="Meiryo"/>
+                <a:ea typeface="メイリオ"/>
+                <a:cs typeface="メイリオ"/>
               </a:rPr>
               <a:t>▶</a:t>
             </a:r>
@@ -3634,8 +3634,8 @@
         </p:nvSpPr>
         <p:spPr>
           <a:xfrm>
-            <a:off x="2779776" y="2971800"/>
-            <a:ext cx="2103120" cy="786384"/>
+            <a:off x="2729484" y="2999232"/>
+            <a:ext cx="2103120" cy="868680"/>
           </a:xfrm>
           <a:prstGeom prst="roundRect">
             <a:avLst>
@@ -3682,8 +3682,8 @@
         </p:nvSpPr>
         <p:spPr>
           <a:xfrm>
-            <a:off x="2807208" y="2971800"/>
-            <a:ext cx="2048255" cy="786384"/>
+            <a:off x="2766060" y="2999232"/>
+            <a:ext cx="2029967" cy="868680"/>
           </a:xfrm>
           <a:prstGeom prst="rect">
             <a:avLst/>
@@ -3691,20 +3691,20 @@
           <a:noFill/>
         </p:spPr>
         <p:txBody>
-          <a:bodyPr wrap="square" anchor="ctr" lIns="63500" rIns="63500" tIns="25400" bIns="25400">
+          <a:bodyPr wrap="square" anchor="ctr" lIns="76200" rIns="76200" tIns="25400" bIns="25400">
             <a:spAutoFit/>
           </a:bodyPr>
           <a:lstStyle/>
           <a:p>
             <a:pPr algn="ctr"/>
             <a:r>
-              <a:rPr sz="1100" b="1">
+              <a:rPr sz="1500" b="1">
                 <a:solidFill>
                   <a:srgbClr val="1E4620"/>
                 </a:solidFill>
-                <a:latin typeface="游ゴシック"/>
-                <a:ea typeface="游ゴシック"/>
-                <a:cs typeface="游ゴシック"/>
+                <a:latin typeface="Meiryo"/>
+                <a:ea typeface="メイリオ"/>
+                <a:cs typeface="メイリオ"/>
               </a:rPr>
               <a:t>第３次ビジョン</a:t>
             </a:r>
@@ -3712,13 +3712,13 @@
           <a:p>
             <a:pPr algn="ctr"/>
             <a:r>
-              <a:rPr sz="850" b="0">
+              <a:rPr sz="1200" b="0">
                 <a:solidFill>
                   <a:srgbClr val="555555"/>
                 </a:solidFill>
-                <a:latin typeface="游ゴシック"/>
-                <a:ea typeface="游ゴシック"/>
-                <a:cs typeface="游ゴシック"/>
+                <a:latin typeface="Meiryo"/>
+                <a:ea typeface="メイリオ"/>
+                <a:cs typeface="メイリオ"/>
               </a:rPr>
               <a:t>戦略計画４</a:t>
             </a:r>
@@ -3733,8 +3733,8 @@
         </p:nvSpPr>
         <p:spPr>
           <a:xfrm>
-            <a:off x="4864608" y="2971800"/>
-            <a:ext cx="274320" cy="786384"/>
+            <a:off x="4805172" y="2999232"/>
+            <a:ext cx="288036" cy="868680"/>
           </a:xfrm>
           <a:prstGeom prst="rect">
             <a:avLst/>
@@ -3742,20 +3742,20 @@
           <a:noFill/>
         </p:spPr>
         <p:txBody>
-          <a:bodyPr wrap="square" anchor="ctr" lIns="63500" rIns="63500" tIns="25400" bIns="25400">
+          <a:bodyPr wrap="square" anchor="ctr" lIns="76200" rIns="76200" tIns="25400" bIns="25400">
             <a:spAutoFit/>
           </a:bodyPr>
           <a:lstStyle/>
           <a:p>
             <a:pPr algn="ctr"/>
             <a:r>
-              <a:rPr sz="1200" b="1">
+              <a:rPr sz="1500" b="1">
                 <a:solidFill>
                   <a:srgbClr val="70AD47"/>
                 </a:solidFill>
-                <a:latin typeface="游ゴシック"/>
-                <a:ea typeface="游ゴシック"/>
-                <a:cs typeface="游ゴシック"/>
+                <a:latin typeface="Meiryo"/>
+                <a:ea typeface="メイリオ"/>
+                <a:cs typeface="メイリオ"/>
               </a:rPr>
               <a:t>▶</a:t>
             </a:r>
@@ -3770,8 +3770,8 @@
         </p:nvSpPr>
         <p:spPr>
           <a:xfrm>
-            <a:off x="5102352" y="2971800"/>
-            <a:ext cx="2103120" cy="786384"/>
+            <a:off x="5047488" y="2999232"/>
+            <a:ext cx="2103120" cy="868680"/>
           </a:xfrm>
           <a:prstGeom prst="roundRect">
             <a:avLst>
@@ -3818,8 +3818,8 @@
         </p:nvSpPr>
         <p:spPr>
           <a:xfrm>
-            <a:off x="5129784" y="2971800"/>
-            <a:ext cx="2048255" cy="786384"/>
+            <a:off x="5084064" y="2999232"/>
+            <a:ext cx="2029967" cy="868680"/>
           </a:xfrm>
           <a:prstGeom prst="rect">
             <a:avLst/>
@@ -3827,20 +3827,20 @@
           <a:noFill/>
         </p:spPr>
         <p:txBody>
-          <a:bodyPr wrap="square" anchor="ctr" lIns="63500" rIns="63500" tIns="25400" bIns="25400">
+          <a:bodyPr wrap="square" anchor="ctr" lIns="76200" rIns="76200" tIns="25400" bIns="25400">
             <a:spAutoFit/>
           </a:bodyPr>
           <a:lstStyle/>
           <a:p>
             <a:pPr algn="ctr"/>
             <a:r>
-              <a:rPr sz="1100" b="1">
+              <a:rPr sz="1500" b="1">
                 <a:solidFill>
                   <a:srgbClr val="1E4620"/>
                 </a:solidFill>
-                <a:latin typeface="游ゴシック"/>
-                <a:ea typeface="游ゴシック"/>
-                <a:cs typeface="游ゴシック"/>
+                <a:latin typeface="Meiryo"/>
+                <a:ea typeface="メイリオ"/>
+                <a:cs typeface="メイリオ"/>
               </a:rPr>
               <a:t>教育振興基本計画</a:t>
             </a:r>
@@ -3848,15 +3848,15 @@
           <a:p>
             <a:pPr algn="ctr"/>
             <a:r>
-              <a:rPr sz="850" b="0">
+              <a:rPr sz="1200" b="0">
                 <a:solidFill>
                   <a:srgbClr val="555555"/>
                 </a:solidFill>
-                <a:latin typeface="游ゴシック"/>
-                <a:ea typeface="游ゴシック"/>
-                <a:cs typeface="游ゴシック"/>
+                <a:latin typeface="Meiryo"/>
+                <a:ea typeface="メイリオ"/>
+                <a:cs typeface="メイリオ"/>
               </a:rPr>
-              <a:t>（令和４～８年度）</a:t>
+              <a:t>令和４～８年度</a:t>
             </a:r>
           </a:p>
         </p:txBody>
@@ -3869,8 +3869,8 @@
         </p:nvSpPr>
         <p:spPr>
           <a:xfrm>
-            <a:off x="7187184" y="2971800"/>
-            <a:ext cx="274320" cy="786384"/>
+            <a:off x="7123175" y="2999232"/>
+            <a:ext cx="288036" cy="868680"/>
           </a:xfrm>
           <a:prstGeom prst="rect">
             <a:avLst/>
@@ -3878,20 +3878,20 @@
           <a:noFill/>
         </p:spPr>
         <p:txBody>
-          <a:bodyPr wrap="square" anchor="ctr" lIns="63500" rIns="63500" tIns="25400" bIns="25400">
+          <a:bodyPr wrap="square" anchor="ctr" lIns="76200" rIns="76200" tIns="25400" bIns="25400">
             <a:spAutoFit/>
           </a:bodyPr>
           <a:lstStyle/>
           <a:p>
             <a:pPr algn="ctr"/>
             <a:r>
-              <a:rPr sz="1200" b="1">
+              <a:rPr sz="1500" b="1">
                 <a:solidFill>
                   <a:srgbClr val="70AD47"/>
                 </a:solidFill>
-                <a:latin typeface="游ゴシック"/>
-                <a:ea typeface="游ゴシック"/>
-                <a:cs typeface="游ゴシック"/>
+                <a:latin typeface="Meiryo"/>
+                <a:ea typeface="メイリオ"/>
+                <a:cs typeface="メイリオ"/>
               </a:rPr>
               <a:t>▶</a:t>
             </a:r>
@@ -3906,8 +3906,8 @@
         </p:nvSpPr>
         <p:spPr>
           <a:xfrm>
-            <a:off x="7424928" y="2971800"/>
-            <a:ext cx="2103120" cy="786384"/>
+            <a:off x="7365491" y="2999232"/>
+            <a:ext cx="2103120" cy="868680"/>
           </a:xfrm>
           <a:prstGeom prst="roundRect">
             <a:avLst>
@@ -3954,8 +3954,8 @@
         </p:nvSpPr>
         <p:spPr>
           <a:xfrm>
-            <a:off x="7452360" y="2971800"/>
-            <a:ext cx="2048255" cy="786384"/>
+            <a:off x="7402067" y="2999232"/>
+            <a:ext cx="2029967" cy="868680"/>
           </a:xfrm>
           <a:prstGeom prst="rect">
             <a:avLst/>
@@ -3963,20 +3963,20 @@
           <a:noFill/>
         </p:spPr>
         <p:txBody>
-          <a:bodyPr wrap="square" anchor="ctr" lIns="63500" rIns="63500" tIns="25400" bIns="25400">
+          <a:bodyPr wrap="square" anchor="ctr" lIns="76200" rIns="76200" tIns="25400" bIns="25400">
             <a:spAutoFit/>
           </a:bodyPr>
           <a:lstStyle/>
           <a:p>
             <a:pPr algn="ctr"/>
             <a:r>
-              <a:rPr sz="1100" b="1">
+              <a:rPr sz="1500" b="1">
                 <a:solidFill>
                   <a:srgbClr val="1E4620"/>
                 </a:solidFill>
-                <a:latin typeface="游ゴシック"/>
-                <a:ea typeface="游ゴシック"/>
-                <a:cs typeface="游ゴシック"/>
+                <a:latin typeface="Meiryo"/>
+                <a:ea typeface="メイリオ"/>
+                <a:cs typeface="メイリオ"/>
               </a:rPr>
               <a:t>重点課題・主要施策</a:t>
             </a:r>
@@ -3984,15 +3984,15 @@
           <a:p>
             <a:pPr algn="ctr"/>
             <a:r>
-              <a:rPr sz="850" b="0">
+              <a:rPr sz="1200" b="0">
                 <a:solidFill>
                   <a:srgbClr val="555555"/>
                 </a:solidFill>
-                <a:latin typeface="游ゴシック"/>
-                <a:ea typeface="游ゴシック"/>
-                <a:cs typeface="游ゴシック"/>
+                <a:latin typeface="Meiryo"/>
+                <a:ea typeface="メイリオ"/>
+                <a:cs typeface="メイリオ"/>
               </a:rPr>
-              <a:t>（３視点×５課題）</a:t>
+              <a:t>３視点×５課題</a:t>
             </a:r>
           </a:p>
         </p:txBody>
@@ -4005,8 +4005,8 @@
         </p:nvSpPr>
         <p:spPr>
           <a:xfrm>
-            <a:off x="9509760" y="2971800"/>
-            <a:ext cx="274320" cy="786384"/>
+            <a:off x="9441179" y="2999232"/>
+            <a:ext cx="288036" cy="868680"/>
           </a:xfrm>
           <a:prstGeom prst="rect">
             <a:avLst/>
@@ -4014,20 +4014,20 @@
           <a:noFill/>
         </p:spPr>
         <p:txBody>
-          <a:bodyPr wrap="square" anchor="ctr" lIns="63500" rIns="63500" tIns="25400" bIns="25400">
+          <a:bodyPr wrap="square" anchor="ctr" lIns="76200" rIns="76200" tIns="25400" bIns="25400">
             <a:spAutoFit/>
           </a:bodyPr>
           <a:lstStyle/>
           <a:p>
             <a:pPr algn="ctr"/>
             <a:r>
-              <a:rPr sz="1200" b="1">
+              <a:rPr sz="1500" b="1">
                 <a:solidFill>
                   <a:srgbClr val="70AD47"/>
                 </a:solidFill>
-                <a:latin typeface="游ゴシック"/>
-                <a:ea typeface="游ゴシック"/>
-                <a:cs typeface="游ゴシック"/>
+                <a:latin typeface="Meiryo"/>
+                <a:ea typeface="メイリオ"/>
+                <a:cs typeface="メイリオ"/>
               </a:rPr>
               <a:t>▶</a:t>
             </a:r>
@@ -4042,8 +4042,8 @@
         </p:nvSpPr>
         <p:spPr>
           <a:xfrm>
-            <a:off x="9747504" y="2971800"/>
-            <a:ext cx="2103120" cy="786384"/>
+            <a:off x="9683495" y="2999232"/>
+            <a:ext cx="2103120" cy="868680"/>
           </a:xfrm>
           <a:prstGeom prst="roundRect">
             <a:avLst>
@@ -4090,8 +4090,8 @@
         </p:nvSpPr>
         <p:spPr>
           <a:xfrm>
-            <a:off x="9774936" y="2971800"/>
-            <a:ext cx="2048255" cy="786384"/>
+            <a:off x="9720071" y="2999232"/>
+            <a:ext cx="2029967" cy="868680"/>
           </a:xfrm>
           <a:prstGeom prst="rect">
             <a:avLst/>
@@ -4099,20 +4099,20 @@
           <a:noFill/>
         </p:spPr>
         <p:txBody>
-          <a:bodyPr wrap="square" anchor="ctr" lIns="63500" rIns="63500" tIns="25400" bIns="25400">
+          <a:bodyPr wrap="square" anchor="ctr" lIns="76200" rIns="76200" tIns="25400" bIns="25400">
             <a:spAutoFit/>
           </a:bodyPr>
           <a:lstStyle/>
           <a:p>
             <a:pPr algn="ctr"/>
             <a:r>
-              <a:rPr sz="1100" b="1">
+              <a:rPr sz="1500" b="1">
                 <a:solidFill>
                   <a:srgbClr val="1E4620"/>
                 </a:solidFill>
-                <a:latin typeface="游ゴシック"/>
-                <a:ea typeface="游ゴシック"/>
-                <a:cs typeface="游ゴシック"/>
+                <a:latin typeface="Meiryo"/>
+                <a:ea typeface="メイリオ"/>
+                <a:cs typeface="メイリオ"/>
               </a:rPr>
               <a:t>各校の教育課程</a:t>
             </a:r>
@@ -4120,15 +4120,15 @@
           <a:p>
             <a:pPr algn="ctr"/>
             <a:r>
-              <a:rPr sz="850" b="0">
+              <a:rPr sz="1200" b="0">
                 <a:solidFill>
                   <a:srgbClr val="555555"/>
                 </a:solidFill>
-                <a:latin typeface="游ゴシック"/>
-                <a:ea typeface="游ゴシック"/>
-                <a:cs typeface="游ゴシック"/>
+                <a:latin typeface="Meiryo"/>
+                <a:ea typeface="メイリオ"/>
+                <a:cs typeface="メイリオ"/>
               </a:rPr>
-              <a:t>（第２表・届出）</a:t>
+              <a:t>第２表・届出</a:t>
             </a:r>
           </a:p>
         </p:txBody>
@@ -4141,8 +4141,8 @@
         </p:nvSpPr>
         <p:spPr>
           <a:xfrm>
-            <a:off x="320040" y="4069080"/>
-            <a:ext cx="11548872" cy="384048"/>
+            <a:off x="320040" y="4114800"/>
+            <a:ext cx="11548872" cy="420624"/>
           </a:xfrm>
           <a:prstGeom prst="rect">
             <a:avLst/>
@@ -4185,8 +4185,8 @@
         </p:nvSpPr>
         <p:spPr>
           <a:xfrm>
-            <a:off x="374904" y="4069080"/>
-            <a:ext cx="11457432" cy="384048"/>
+            <a:off x="393192" y="4114800"/>
+            <a:ext cx="11439144" cy="420624"/>
           </a:xfrm>
           <a:prstGeom prst="rect">
             <a:avLst/>
@@ -4194,19 +4194,19 @@
           <a:noFill/>
         </p:spPr>
         <p:txBody>
-          <a:bodyPr wrap="square" anchor="ctr" lIns="63500" rIns="63500" tIns="25400" bIns="25400">
+          <a:bodyPr wrap="square" anchor="ctr" lIns="76200" rIns="76200" tIns="25400" bIns="25400">
             <a:spAutoFit/>
           </a:bodyPr>
           <a:lstStyle/>
           <a:p>
             <a:r>
-              <a:rPr sz="1400" b="1">
+              <a:rPr sz="1800" b="1">
                 <a:solidFill>
                   <a:srgbClr val="1E4620"/>
                 </a:solidFill>
-                <a:latin typeface="游ゴシック"/>
-                <a:ea typeface="游ゴシック"/>
-                <a:cs typeface="游ゴシック"/>
+                <a:latin typeface="Meiryo"/>
+                <a:ea typeface="メイリオ"/>
+                <a:cs typeface="メイリオ"/>
               </a:rPr>
               <a:t>■ 令和８年度作成の総括（結論）</a:t>
             </a:r>
@@ -4221,8 +4221,8 @@
         </p:nvSpPr>
         <p:spPr>
           <a:xfrm>
-            <a:off x="457200" y="4526280"/>
-            <a:ext cx="11338560" cy="713232"/>
+            <a:off x="457200" y="4645152"/>
+            <a:ext cx="11338560" cy="566928"/>
           </a:xfrm>
           <a:prstGeom prst="rect">
             <a:avLst/>
@@ -4230,32 +4230,32 @@
           <a:noFill/>
         </p:spPr>
         <p:txBody>
-          <a:bodyPr wrap="square" anchor="t" lIns="63500" rIns="63500" tIns="25400" bIns="25400">
+          <a:bodyPr wrap="square" anchor="t" lIns="76200" rIns="76200" tIns="25400" bIns="25400">
             <a:spAutoFit/>
           </a:bodyPr>
           <a:lstStyle/>
           <a:p>
             <a:r>
-              <a:rPr sz="1250" b="1">
+              <a:rPr sz="1600" b="1">
                 <a:solidFill>
                   <a:srgbClr val="2E7D46"/>
                 </a:solidFill>
-                <a:latin typeface="游ゴシック"/>
-                <a:ea typeface="游ゴシック"/>
-                <a:cs typeface="游ゴシック"/>
+                <a:latin typeface="Meiryo"/>
+                <a:ea typeface="メイリオ"/>
+                <a:cs typeface="メイリオ"/>
               </a:rPr>
-              <a:t>① 視点の絞り込み（筋を通す）　</a:t>
-            </a:r>
-            <a:r>
-              <a:rPr sz="1150" b="0">
+              <a:t>① 視点の絞り込み　</a:t>
+            </a:r>
+            <a:r>
+              <a:rPr sz="1600" b="0">
                 <a:solidFill>
                   <a:srgbClr val="222222"/>
                 </a:solidFill>
-                <a:latin typeface="游ゴシック"/>
-                <a:ea typeface="游ゴシック"/>
-                <a:cs typeface="游ゴシック"/>
+                <a:latin typeface="Meiryo"/>
+                <a:ea typeface="メイリオ"/>
+                <a:cs typeface="メイリオ"/>
               </a:rPr>
-              <a:t>課長指示「視点が絞れていない」を起点に、大綱・基本計画の３つの視点へ整理。上位計画から各校の教育課程まで根拠を一直線に。</a:t>
+              <a:t>大綱・基本計画の３視点へ整理し、上位計画から各校の教育課程まで根拠を一直線に（課長指示）。</a:t>
             </a:r>
           </a:p>
         </p:txBody>
@@ -4268,8 +4268,8 @@
         </p:nvSpPr>
         <p:spPr>
           <a:xfrm>
-            <a:off x="457200" y="5257800"/>
-            <a:ext cx="11338560" cy="713232"/>
+            <a:off x="457200" y="5248656"/>
+            <a:ext cx="11338560" cy="566928"/>
           </a:xfrm>
           <a:prstGeom prst="rect">
             <a:avLst/>
@@ -4277,32 +4277,32 @@
           <a:noFill/>
         </p:spPr>
         <p:txBody>
-          <a:bodyPr wrap="square" anchor="t" lIns="63500" rIns="63500" tIns="25400" bIns="25400">
+          <a:bodyPr wrap="square" anchor="t" lIns="76200" rIns="76200" tIns="25400" bIns="25400">
             <a:spAutoFit/>
           </a:bodyPr>
           <a:lstStyle/>
           <a:p>
             <a:r>
-              <a:rPr sz="1250" b="1">
+              <a:rPr sz="1600" b="1">
                 <a:solidFill>
                   <a:srgbClr val="2E7D46"/>
                 </a:solidFill>
-                <a:latin typeface="游ゴシック"/>
-                <a:ea typeface="游ゴシック"/>
-                <a:cs typeface="游ゴシック"/>
+                <a:latin typeface="Meiryo"/>
+                <a:ea typeface="メイリオ"/>
+                <a:cs typeface="メイリオ"/>
               </a:rPr>
-              <a:t>② 見える化（区の重点・予算・差分）　</a:t>
-            </a:r>
-            <a:r>
-              <a:rPr sz="1150" b="0">
+              <a:t>② 見える化　</a:t>
+            </a:r>
+            <a:r>
+              <a:rPr sz="1600" b="0">
                 <a:solidFill>
                   <a:srgbClr val="222222"/>
                 </a:solidFill>
-                <a:latin typeface="游ゴシック"/>
-                <a:ea typeface="游ゴシック"/>
-                <a:cs typeface="游ゴシック"/>
+                <a:latin typeface="Meiryo"/>
+                <a:ea typeface="メイリオ"/>
+                <a:cs typeface="メイリオ"/>
               </a:rPr>
-              <a:t>副参事指示により〔新規／拡充／充実／継続〕を付与し、新規事業を赤字・吹き出しで明示。区の姿勢と昨年度差分を一目で。</a:t>
+              <a:t>〔新規／拡充等〕と新規事業の赤字で、区の重点・予算・昨年度差分を明示（副参事指示）。</a:t>
             </a:r>
           </a:p>
         </p:txBody>
@@ -4315,8 +4315,8 @@
         </p:nvSpPr>
         <p:spPr>
           <a:xfrm>
-            <a:off x="457200" y="5989320"/>
-            <a:ext cx="11338560" cy="713232"/>
+            <a:off x="457200" y="5852160"/>
+            <a:ext cx="11338560" cy="566928"/>
           </a:xfrm>
           <a:prstGeom prst="rect">
             <a:avLst/>
@@ -4324,32 +4324,32 @@
           <a:noFill/>
         </p:spPr>
         <p:txBody>
-          <a:bodyPr wrap="square" anchor="t" lIns="63500" rIns="63500" tIns="25400" bIns="25400">
+          <a:bodyPr wrap="square" anchor="t" lIns="76200" rIns="76200" tIns="25400" bIns="25400">
             <a:spAutoFit/>
           </a:bodyPr>
           <a:lstStyle/>
           <a:p>
             <a:r>
-              <a:rPr sz="1250" b="1">
+              <a:rPr sz="1600" b="1">
                 <a:solidFill>
                   <a:srgbClr val="2E7D46"/>
                 </a:solidFill>
-                <a:latin typeface="游ゴシック"/>
-                <a:ea typeface="游ゴシック"/>
-                <a:cs typeface="游ゴシック"/>
+                <a:latin typeface="Meiryo"/>
+                <a:ea typeface="メイリオ"/>
+                <a:cs typeface="メイリオ"/>
               </a:rPr>
               <a:t>③「支援が必要な子ども」の重点化　</a:t>
             </a:r>
             <a:r>
-              <a:rPr sz="1150" b="0">
+              <a:rPr sz="1600" b="0">
                 <a:solidFill>
                   <a:srgbClr val="222222"/>
                 </a:solidFill>
-                <a:latin typeface="游ゴシック"/>
-                <a:ea typeface="游ゴシック"/>
-                <a:cs typeface="游ゴシック"/>
+                <a:latin typeface="Meiryo"/>
+                <a:ea typeface="メイリオ"/>
+                <a:cs typeface="メイリオ"/>
               </a:rPr>
-              <a:t>大綱改定の新設施策とビジョンの課題認識を根拠に、不登校・多様な家庭環境・特別支援への取組を重点化。</a:t>
+              <a:t>大綱改定の新設施策・ビジョンの課題を根拠に、不登校・多様な家庭環境・特別支援の取組を重点化。</a:t>
             </a:r>
           </a:p>
         </p:txBody>
@@ -4424,8 +4424,8 @@
         </p:nvSpPr>
         <p:spPr>
           <a:xfrm>
-            <a:off x="320040" y="54864"/>
-            <a:ext cx="11521440" cy="731520"/>
+            <a:off x="320040" y="45720"/>
+            <a:ext cx="11521440" cy="749808"/>
           </a:xfrm>
           <a:prstGeom prst="rect">
             <a:avLst/>
@@ -4433,19 +4433,19 @@
           <a:noFill/>
         </p:spPr>
         <p:txBody>
-          <a:bodyPr wrap="square" anchor="ctr" lIns="63500" rIns="63500" tIns="25400" bIns="25400">
+          <a:bodyPr wrap="square" anchor="ctr" lIns="76200" rIns="76200" tIns="25400" bIns="25400">
             <a:spAutoFit/>
           </a:bodyPr>
           <a:lstStyle/>
           <a:p>
             <a:r>
-              <a:rPr sz="2500" b="1">
+              <a:rPr sz="2400" b="1">
                 <a:solidFill>
                   <a:srgbClr val="FFFFFF"/>
                 </a:solidFill>
-                <a:latin typeface="游ゴシック"/>
-                <a:ea typeface="游ゴシック"/>
-                <a:cs typeface="游ゴシック"/>
+                <a:latin typeface="Meiryo"/>
+                <a:ea typeface="メイリオ"/>
+                <a:cs typeface="メイリオ"/>
               </a:rPr>
               <a:t>令和７年度からの主な変更点</a:t>
             </a:r>
@@ -4461,7 +4461,7 @@
         <p:spPr>
           <a:xfrm>
             <a:off x="0" y="841248"/>
-            <a:ext cx="12191695" cy="420624"/>
+            <a:ext cx="12191695" cy="438912"/>
           </a:xfrm>
           <a:prstGeom prst="rect">
             <a:avLst/>
@@ -4505,7 +4505,7 @@
         <p:spPr>
           <a:xfrm>
             <a:off x="320040" y="850392"/>
-            <a:ext cx="11521440" cy="402336"/>
+            <a:ext cx="11521440" cy="420624"/>
           </a:xfrm>
           <a:prstGeom prst="rect">
             <a:avLst/>
@@ -4513,19 +4513,19 @@
           <a:noFill/>
         </p:spPr>
         <p:txBody>
-          <a:bodyPr wrap="square" anchor="ctr" lIns="63500" rIns="63500" tIns="25400" bIns="25400">
+          <a:bodyPr wrap="square" anchor="ctr" lIns="76200" rIns="76200" tIns="25400" bIns="25400">
             <a:spAutoFit/>
           </a:bodyPr>
           <a:lstStyle/>
           <a:p>
             <a:r>
-              <a:rPr sz="1350" b="1">
+              <a:rPr sz="1600" b="1">
                 <a:solidFill>
                   <a:srgbClr val="FFFFFF"/>
                 </a:solidFill>
-                <a:latin typeface="游ゴシック"/>
-                <a:ea typeface="游ゴシック"/>
-                <a:cs typeface="游ゴシック"/>
+                <a:latin typeface="Meiryo"/>
+                <a:ea typeface="メイリオ"/>
+                <a:cs typeface="メイリオ"/>
               </a:rPr>
               <a:t>「どの資料を生かして、何を追記・修正したか」― 根拠を明示</a:t>
             </a:r>
@@ -4540,8 +4540,8 @@
         </p:nvSpPr>
         <p:spPr>
           <a:xfrm>
-            <a:off x="7680960" y="1371600"/>
-            <a:ext cx="4206240" cy="320040"/>
+            <a:off x="6583680" y="1353312"/>
+            <a:ext cx="5303520" cy="365760"/>
           </a:xfrm>
           <a:prstGeom prst="rect">
             <a:avLst/>
@@ -4549,53 +4549,53 @@
           <a:noFill/>
         </p:spPr>
         <p:txBody>
-          <a:bodyPr wrap="square" anchor="t" lIns="63500" rIns="63500" tIns="25400" bIns="25400">
+          <a:bodyPr wrap="square" anchor="t" lIns="76200" rIns="76200" tIns="25400" bIns="25400">
             <a:spAutoFit/>
           </a:bodyPr>
           <a:lstStyle/>
           <a:p>
             <a:pPr algn="r"/>
             <a:r>
-              <a:rPr sz="1100" b="1">
+              <a:rPr sz="1400" b="1">
                 <a:solidFill>
                   <a:srgbClr val="C00000"/>
                 </a:solidFill>
-                <a:latin typeface="游ゴシック"/>
-                <a:ea typeface="游ゴシック"/>
-                <a:cs typeface="游ゴシック"/>
+                <a:latin typeface="Meiryo"/>
+                <a:ea typeface="メイリオ"/>
+                <a:cs typeface="メイリオ"/>
               </a:rPr>
               <a:t>（新規）</a:t>
             </a:r>
             <a:r>
-              <a:rPr sz="1050" b="0">
+              <a:rPr sz="1300" b="0">
                 <a:solidFill>
                   <a:srgbClr val="222222"/>
                 </a:solidFill>
-                <a:latin typeface="游ゴシック"/>
-                <a:ea typeface="游ゴシック"/>
-                <a:cs typeface="游ゴシック"/>
+                <a:latin typeface="Meiryo"/>
+                <a:ea typeface="メイリオ"/>
+                <a:cs typeface="メイリオ"/>
               </a:rPr>
               <a:t>＝新たに着手　</a:t>
             </a:r>
             <a:r>
-              <a:rPr sz="1100" b="1">
+              <a:rPr sz="1400" b="1">
                 <a:solidFill>
                   <a:srgbClr val="1F4E79"/>
                 </a:solidFill>
-                <a:latin typeface="游ゴシック"/>
-                <a:ea typeface="游ゴシック"/>
-                <a:cs typeface="游ゴシック"/>
+                <a:latin typeface="Meiryo"/>
+                <a:ea typeface="メイリオ"/>
+                <a:cs typeface="メイリオ"/>
               </a:rPr>
               <a:t>（拡充）</a:t>
             </a:r>
             <a:r>
-              <a:rPr sz="1050" b="0">
+              <a:rPr sz="1300" b="0">
                 <a:solidFill>
                   <a:srgbClr val="222222"/>
                 </a:solidFill>
-                <a:latin typeface="游ゴシック"/>
-                <a:ea typeface="游ゴシック"/>
-                <a:cs typeface="游ゴシック"/>
+                <a:latin typeface="Meiryo"/>
+                <a:ea typeface="メイリオ"/>
+                <a:cs typeface="メイリオ"/>
               </a:rPr>
               <a:t>＝規模・質を拡充</a:t>
             </a:r>
@@ -4611,8 +4611,8 @@
           <p:nvPr/>
         </p:nvGraphicFramePr>
         <p:xfrm>
-          <a:off x="320040" y="1783080"/>
-          <a:ext cx="11548872" cy="4773168"/>
+          <a:off x="320040" y="1810512"/>
+          <a:ext cx="11548872" cy="4572000"/>
         </p:xfrm>
         <a:graphic>
           <a:graphicData uri="http://schemas.openxmlformats.org/drawingml/2006/table">
@@ -4621,12 +4621,12 @@
                 <a:tableStyleId>{5C22544A-7EE6-4342-B048-85BDC9FD1C3A}</a:tableStyleId>
               </a:tblPr>
               <a:tblGrid>
-                <a:gridCol w="960120"/>
-                <a:gridCol w="2514600"/>
-                <a:gridCol w="4526280"/>
-                <a:gridCol w="3547872"/>
+                <a:gridCol w="1143000"/>
+                <a:gridCol w="2697480"/>
+                <a:gridCol w="4709160"/>
+                <a:gridCol w="2999232"/>
               </a:tblGrid>
-              <a:tr h="384048">
+              <a:tr h="457200">
                 <a:tc>
                   <a:txBody>
                     <a:bodyPr wrap="square"/>
@@ -4634,19 +4634,19 @@
                     <a:p>
                       <a:pPr algn="ctr"/>
                       <a:r>
-                        <a:rPr sz="1150" b="1">
+                        <a:rPr sz="1600" b="1">
                           <a:solidFill>
                             <a:srgbClr val="FFFFFF"/>
                           </a:solidFill>
-                          <a:latin typeface="游ゴシック"/>
-                          <a:ea typeface="游ゴシック"/>
-                          <a:cs typeface="游ゴシック"/>
+                          <a:latin typeface="Meiryo"/>
+                          <a:ea typeface="メイリオ"/>
+                          <a:cs typeface="メイリオ"/>
                         </a:rPr>
                         <a:t>区分</a:t>
                       </a:r>
                     </a:p>
                   </a:txBody>
-                  <a:tcPr marL="50800" marR="50800" marT="12700" marB="12700" anchor="ctr">
+                  <a:tcPr marL="76200" marR="76200" marT="25400" marB="25400" anchor="ctr">
                     <a:solidFill>
                       <a:srgbClr val="2E7D46"/>
                     </a:solidFill>
@@ -4659,19 +4659,19 @@
                     <a:p>
                       <a:pPr algn="ctr"/>
                       <a:r>
-                        <a:rPr sz="1150" b="1">
+                        <a:rPr sz="1600" b="1">
                           <a:solidFill>
                             <a:srgbClr val="FFFFFF"/>
                           </a:solidFill>
-                          <a:latin typeface="游ゴシック"/>
-                          <a:ea typeface="游ゴシック"/>
-                          <a:cs typeface="游ゴシック"/>
+                          <a:latin typeface="Meiryo"/>
+                          <a:ea typeface="メイリオ"/>
+                          <a:cs typeface="メイリオ"/>
                         </a:rPr>
                         <a:t>生かした資料</a:t>
                       </a:r>
                     </a:p>
                   </a:txBody>
-                  <a:tcPr marL="50800" marR="50800" marT="12700" marB="12700" anchor="ctr">
+                  <a:tcPr marL="76200" marR="76200" marT="25400" marB="25400" anchor="ctr">
                     <a:solidFill>
                       <a:srgbClr val="2E7D46"/>
                     </a:solidFill>
@@ -4684,19 +4684,19 @@
                     <a:p>
                       <a:pPr algn="ctr"/>
                       <a:r>
-                        <a:rPr sz="1150" b="1">
+                        <a:rPr sz="1600" b="1">
                           <a:solidFill>
                             <a:srgbClr val="FFFFFF"/>
                           </a:solidFill>
-                          <a:latin typeface="游ゴシック"/>
-                          <a:ea typeface="游ゴシック"/>
-                          <a:cs typeface="游ゴシック"/>
+                          <a:latin typeface="Meiryo"/>
+                          <a:ea typeface="メイリオ"/>
+                          <a:cs typeface="メイリオ"/>
                         </a:rPr>
                         <a:t>追記・修正したこと（Ｒ７→Ｒ８）</a:t>
                       </a:r>
                     </a:p>
                   </a:txBody>
-                  <a:tcPr marL="50800" marR="50800" marT="12700" marB="12700" anchor="ctr">
+                  <a:tcPr marL="76200" marR="76200" marT="25400" marB="25400" anchor="ctr">
                     <a:solidFill>
                       <a:srgbClr val="2E7D46"/>
                     </a:solidFill>
@@ -4709,26 +4709,26 @@
                     <a:p>
                       <a:pPr algn="ctr"/>
                       <a:r>
-                        <a:rPr sz="1150" b="1">
+                        <a:rPr sz="1600" b="1">
                           <a:solidFill>
                             <a:srgbClr val="FFFFFF"/>
                           </a:solidFill>
-                          <a:latin typeface="游ゴシック"/>
-                          <a:ea typeface="游ゴシック"/>
-                          <a:cs typeface="游ゴシック"/>
+                          <a:latin typeface="Meiryo"/>
+                          <a:ea typeface="メイリオ"/>
+                          <a:cs typeface="メイリオ"/>
                         </a:rPr>
                         <a:t>根拠・ねらい</a:t>
                       </a:r>
                     </a:p>
                   </a:txBody>
-                  <a:tcPr marL="50800" marR="50800" marT="12700" marB="12700" anchor="ctr">
+                  <a:tcPr marL="76200" marR="76200" marT="25400" marB="25400" anchor="ctr">
                     <a:solidFill>
                       <a:srgbClr val="2E7D46"/>
                     </a:solidFill>
                   </a:tcPr>
                 </a:tc>
               </a:tr>
-              <a:tr h="548640">
+              <a:tr h="822960">
                 <a:tc>
                   <a:txBody>
                     <a:bodyPr wrap="square"/>
@@ -4736,19 +4736,19 @@
                     <a:p>
                       <a:pPr algn="ctr"/>
                       <a:r>
-                        <a:rPr sz="1100" b="1">
+                        <a:rPr sz="1500" b="1">
                           <a:solidFill>
                             <a:srgbClr val="2E7D46"/>
                           </a:solidFill>
-                          <a:latin typeface="游ゴシック"/>
-                          <a:ea typeface="游ゴシック"/>
-                          <a:cs typeface="游ゴシック"/>
+                          <a:latin typeface="Meiryo"/>
+                          <a:ea typeface="メイリオ"/>
+                          <a:cs typeface="メイリオ"/>
                         </a:rPr>
                         <a:t>構造</a:t>
                       </a:r>
                     </a:p>
                   </a:txBody>
-                  <a:tcPr marL="50800" marR="50800" marT="12700" marB="12700" anchor="ctr">
+                  <a:tcPr marL="76200" marR="76200" marT="25400" marB="25400" anchor="ctr">
                     <a:solidFill>
                       <a:srgbClr val="FFFFFF"/>
                     </a:solidFill>
@@ -4760,19 +4760,19 @@
                     <a:lstStyle/>
                     <a:p>
                       <a:r>
-                        <a:rPr sz="1050" b="0">
+                        <a:rPr sz="1600" b="0">
                           <a:solidFill>
                             <a:srgbClr val="222222"/>
                           </a:solidFill>
-                          <a:latin typeface="游ゴシック"/>
-                          <a:ea typeface="游ゴシック"/>
-                          <a:cs typeface="游ゴシック"/>
+                          <a:latin typeface="Meiryo"/>
+                          <a:ea typeface="メイリオ"/>
+                          <a:cs typeface="メイリオ"/>
                         </a:rPr>
                         <a:t>課長指示／足立区事例</a:t>
                       </a:r>
                     </a:p>
                   </a:txBody>
-                  <a:tcPr marL="50800" marR="50800" marT="12700" marB="12700" anchor="ctr">
+                  <a:tcPr marL="76200" marR="76200" marT="25400" marB="25400" anchor="ctr">
                     <a:solidFill>
                       <a:srgbClr val="FFFFFF"/>
                     </a:solidFill>
@@ -4784,30 +4784,30 @@
                     <a:lstStyle/>
                     <a:p>
                       <a:r>
-                        <a:rPr sz="1000" b="0">
+                        <a:rPr sz="1600" b="0">
                           <a:solidFill>
                             <a:srgbClr val="222222"/>
                           </a:solidFill>
-                          <a:latin typeface="游ゴシック"/>
-                          <a:ea typeface="游ゴシック"/>
-                          <a:cs typeface="游ゴシック"/>
+                          <a:latin typeface="Meiryo"/>
+                          <a:ea typeface="メイリオ"/>
+                          <a:cs typeface="メイリオ"/>
                         </a:rPr>
                         <a:t>５重点課題を</a:t>
                       </a:r>
                       <a:r>
-                        <a:rPr sz="1000" b="1">
+                        <a:rPr sz="1600" b="1">
                           <a:solidFill>
                             <a:srgbClr val="2E7D46"/>
                           </a:solidFill>
-                          <a:latin typeface="游ゴシック"/>
-                          <a:ea typeface="游ゴシック"/>
-                          <a:cs typeface="游ゴシック"/>
+                          <a:latin typeface="Meiryo"/>
+                          <a:ea typeface="メイリオ"/>
+                          <a:cs typeface="メイリオ"/>
                         </a:rPr>
                         <a:t>「３つの視点」の下に整理・前面化</a:t>
                       </a:r>
                     </a:p>
                   </a:txBody>
-                  <a:tcPr marL="50800" marR="50800" marT="12700" marB="12700" anchor="ctr">
+                  <a:tcPr marL="76200" marR="76200" marT="25400" marB="25400" anchor="ctr">
                     <a:solidFill>
                       <a:srgbClr val="FFFFFF"/>
                     </a:solidFill>
@@ -4819,26 +4819,26 @@
                     <a:lstStyle/>
                     <a:p>
                       <a:r>
-                        <a:rPr sz="1000" b="0">
+                        <a:rPr sz="1600" b="0">
                           <a:solidFill>
                             <a:srgbClr val="222222"/>
                           </a:solidFill>
-                          <a:latin typeface="游ゴシック"/>
-                          <a:ea typeface="游ゴシック"/>
-                          <a:cs typeface="游ゴシック"/>
+                          <a:latin typeface="Meiryo"/>
+                          <a:ea typeface="メイリオ"/>
+                          <a:cs typeface="メイリオ"/>
                         </a:rPr>
-                        <a:t>「視点が絞れていない」の解消。大綱・基本計画の３視点に一致</a:t>
+                        <a:t>大綱・基本計画の３視点に一致（視点の絞り込み）</a:t>
                       </a:r>
                     </a:p>
                   </a:txBody>
-                  <a:tcPr marL="50800" marR="50800" marT="12700" marB="12700" anchor="ctr">
+                  <a:tcPr marL="76200" marR="76200" marT="25400" marB="25400" anchor="ctr">
                     <a:solidFill>
                       <a:srgbClr val="FFFFFF"/>
                     </a:solidFill>
                   </a:tcPr>
                 </a:tc>
               </a:tr>
-              <a:tr h="548640">
+              <a:tr h="822960">
                 <a:tc>
                   <a:txBody>
                     <a:bodyPr wrap="square"/>
@@ -4846,19 +4846,19 @@
                     <a:p>
                       <a:pPr algn="ctr"/>
                       <a:r>
-                        <a:rPr sz="1100" b="1">
+                        <a:rPr sz="1500" b="1">
                           <a:solidFill>
                             <a:srgbClr val="2E7D46"/>
                           </a:solidFill>
-                          <a:latin typeface="游ゴシック"/>
-                          <a:ea typeface="游ゴシック"/>
-                          <a:cs typeface="游ゴシック"/>
+                          <a:latin typeface="Meiryo"/>
+                          <a:ea typeface="メイリオ"/>
+                          <a:cs typeface="メイリオ"/>
                         </a:rPr>
                         <a:t>体裁</a:t>
                       </a:r>
                     </a:p>
                   </a:txBody>
-                  <a:tcPr marL="50800" marR="50800" marT="12700" marB="12700" anchor="ctr">
+                  <a:tcPr marL="76200" marR="76200" marT="25400" marB="25400" anchor="ctr">
                     <a:solidFill>
                       <a:srgbClr val="F2F8EE"/>
                     </a:solidFill>
@@ -4870,19 +4870,19 @@
                     <a:lstStyle/>
                     <a:p>
                       <a:r>
-                        <a:rPr sz="1050" b="0">
+                        <a:rPr sz="1600" b="0">
                           <a:solidFill>
                             <a:srgbClr val="222222"/>
                           </a:solidFill>
-                          <a:latin typeface="游ゴシック"/>
-                          <a:ea typeface="游ゴシック"/>
-                          <a:cs typeface="游ゴシック"/>
+                          <a:latin typeface="Meiryo"/>
+                          <a:ea typeface="メイリオ"/>
+                          <a:cs typeface="メイリオ"/>
                         </a:rPr>
                         <a:t>課長・副参事指示</a:t>
                       </a:r>
                     </a:p>
                   </a:txBody>
-                  <a:tcPr marL="50800" marR="50800" marT="12700" marB="12700" anchor="ctr">
+                  <a:tcPr marL="76200" marR="76200" marT="25400" marB="25400" anchor="ctr">
                     <a:solidFill>
                       <a:srgbClr val="F2F8EE"/>
                     </a:solidFill>
@@ -4894,30 +4894,30 @@
                     <a:lstStyle/>
                     <a:p>
                       <a:r>
-                        <a:rPr sz="1000" b="0">
+                        <a:rPr sz="1600" b="0">
                           <a:solidFill>
                             <a:srgbClr val="222222"/>
                           </a:solidFill>
-                          <a:latin typeface="游ゴシック"/>
-                          <a:ea typeface="游ゴシック"/>
-                          <a:cs typeface="游ゴシック"/>
+                          <a:latin typeface="Meiryo"/>
+                          <a:ea typeface="メイリオ"/>
+                          <a:cs typeface="メイリオ"/>
                         </a:rPr>
-                        <a:t>主要施策に〔新規/拡充等〕付与＋</a:t>
+                        <a:t>〔新規／拡充等〕を付与＋</a:t>
                       </a:r>
                       <a:r>
-                        <a:rPr sz="1000" b="1">
+                        <a:rPr sz="1600" b="1">
                           <a:solidFill>
                             <a:srgbClr val="2E7D46"/>
                           </a:solidFill>
-                          <a:latin typeface="游ゴシック"/>
-                          <a:ea typeface="游ゴシック"/>
-                          <a:cs typeface="游ゴシック"/>
+                          <a:latin typeface="Meiryo"/>
+                          <a:ea typeface="メイリオ"/>
+                          <a:cs typeface="メイリオ"/>
                         </a:rPr>
-                        <a:t>新規事業を赤字・吹き出し</a:t>
+                        <a:t>新規事業を赤字で明示</a:t>
                       </a:r>
                     </a:p>
                   </a:txBody>
-                  <a:tcPr marL="50800" marR="50800" marT="12700" marB="12700" anchor="ctr">
+                  <a:tcPr marL="76200" marR="76200" marT="25400" marB="25400" anchor="ctr">
                     <a:solidFill>
                       <a:srgbClr val="F2F8EE"/>
                     </a:solidFill>
@@ -4929,26 +4929,26 @@
                     <a:lstStyle/>
                     <a:p>
                       <a:r>
-                        <a:rPr sz="1000" b="0">
+                        <a:rPr sz="1600" b="0">
                           <a:solidFill>
                             <a:srgbClr val="222222"/>
                           </a:solidFill>
-                          <a:latin typeface="游ゴシック"/>
-                          <a:ea typeface="游ゴシック"/>
-                          <a:cs typeface="游ゴシック"/>
+                          <a:latin typeface="Meiryo"/>
+                          <a:ea typeface="メイリオ"/>
+                          <a:cs typeface="メイリオ"/>
                         </a:rPr>
-                        <a:t>区の重点・予算化事業と昨年度差分の見える化</a:t>
+                        <a:t>区の重点・予算化と昨年度差分の見える化</a:t>
                       </a:r>
                     </a:p>
                   </a:txBody>
-                  <a:tcPr marL="50800" marR="50800" marT="12700" marB="12700" anchor="ctr">
+                  <a:tcPr marL="76200" marR="76200" marT="25400" marB="25400" anchor="ctr">
                     <a:solidFill>
                       <a:srgbClr val="F2F8EE"/>
                     </a:solidFill>
                   </a:tcPr>
                 </a:tc>
               </a:tr>
-              <a:tr h="548640">
+              <a:tr h="822960">
                 <a:tc>
                   <a:txBody>
                     <a:bodyPr wrap="square"/>
@@ -4956,19 +4956,19 @@
                     <a:p>
                       <a:pPr algn="ctr"/>
                       <a:r>
-                        <a:rPr sz="1100" b="1">
+                        <a:rPr sz="1500" b="1">
                           <a:solidFill>
                             <a:srgbClr val="C00000"/>
                           </a:solidFill>
-                          <a:latin typeface="游ゴシック"/>
-                          <a:ea typeface="游ゴシック"/>
-                          <a:cs typeface="游ゴシック"/>
+                          <a:latin typeface="Meiryo"/>
+                          <a:ea typeface="メイリオ"/>
+                          <a:cs typeface="メイリオ"/>
                         </a:rPr>
                         <a:t>新規</a:t>
                       </a:r>
                     </a:p>
                   </a:txBody>
-                  <a:tcPr marL="50800" marR="50800" marT="12700" marB="12700" anchor="ctr">
+                  <a:tcPr marL="76200" marR="76200" marT="25400" marB="25400" anchor="ctr">
                     <a:solidFill>
                       <a:srgbClr val="FFFFFF"/>
                     </a:solidFill>
@@ -4980,19 +4980,19 @@
                     <a:lstStyle/>
                     <a:p>
                       <a:r>
-                        <a:rPr sz="1050" b="0">
+                        <a:rPr sz="1600" b="0">
                           <a:solidFill>
                             <a:srgbClr val="222222"/>
                           </a:solidFill>
-                          <a:latin typeface="游ゴシック"/>
-                          <a:ea typeface="游ゴシック"/>
-                          <a:cs typeface="游ゴシック"/>
+                          <a:latin typeface="Meiryo"/>
+                          <a:ea typeface="メイリオ"/>
+                          <a:cs typeface="メイリオ"/>
                         </a:rPr>
                         <a:t>大綱改定の新設施策／ビジョンの課題</a:t>
                       </a:r>
                     </a:p>
                   </a:txBody>
-                  <a:tcPr marL="50800" marR="50800" marT="12700" marB="12700" anchor="ctr">
+                  <a:tcPr marL="76200" marR="76200" marT="25400" marB="25400" anchor="ctr">
                     <a:solidFill>
                       <a:srgbClr val="FFFFFF"/>
                     </a:solidFill>
@@ -5004,63 +5004,30 @@
                     <a:lstStyle/>
                     <a:p>
                       <a:r>
-                        <a:rPr sz="1000" b="0">
+                        <a:rPr sz="1600" b="0">
                           <a:solidFill>
                             <a:srgbClr val="222222"/>
                           </a:solidFill>
-                          <a:latin typeface="游ゴシック"/>
-                          <a:ea typeface="游ゴシック"/>
-                          <a:cs typeface="游ゴシック"/>
+                          <a:latin typeface="Meiryo"/>
+                          <a:ea typeface="メイリオ"/>
+                          <a:cs typeface="メイリオ"/>
                         </a:rPr>
-                        <a:t>巡回指導教員・</a:t>
+                        <a:t>支援が必要な子どもを重点化：</a:t>
                       </a:r>
                       <a:r>
-                        <a:rPr sz="1000" b="1">
+                        <a:rPr sz="1600" b="1">
                           <a:solidFill>
                             <a:srgbClr val="C00000"/>
                           </a:solidFill>
-                          <a:latin typeface="游ゴシック"/>
-                          <a:ea typeface="游ゴシック"/>
-                          <a:cs typeface="游ゴシック"/>
+                          <a:latin typeface="Meiryo"/>
+                          <a:ea typeface="メイリオ"/>
+                          <a:cs typeface="メイリオ"/>
                         </a:rPr>
-                        <a:t>校内別室支援員</a:t>
-                      </a:r>
-                      <a:r>
-                        <a:rPr sz="1000" b="0">
-                          <a:solidFill>
-                            <a:srgbClr val="222222"/>
-                          </a:solidFill>
-                          <a:latin typeface="游ゴシック"/>
-                          <a:ea typeface="游ゴシック"/>
-                          <a:cs typeface="游ゴシック"/>
-                        </a:rPr>
-                        <a:t>・</a:t>
-                      </a:r>
-                      <a:r>
-                        <a:rPr sz="1000" b="1">
-                          <a:solidFill>
-                            <a:srgbClr val="C00000"/>
-                          </a:solidFill>
-                          <a:latin typeface="游ゴシック"/>
-                          <a:ea typeface="游ゴシック"/>
-                          <a:cs typeface="游ゴシック"/>
-                        </a:rPr>
-                        <a:t>日本語指導加配</a:t>
-                      </a:r>
-                      <a:r>
-                        <a:rPr sz="1000" b="0">
-                          <a:solidFill>
-                            <a:srgbClr val="222222"/>
-                          </a:solidFill>
-                          <a:latin typeface="游ゴシック"/>
-                          <a:ea typeface="游ゴシック"/>
-                          <a:cs typeface="游ゴシック"/>
-                        </a:rPr>
-                        <a:t>（支援重点化）</a:t>
+                        <a:t>校内別室支援員・日本語指導加配・巡回指導</a:t>
                       </a:r>
                     </a:p>
                   </a:txBody>
-                  <a:tcPr marL="50800" marR="50800" marT="12700" marB="12700" anchor="ctr">
+                  <a:tcPr marL="76200" marR="76200" marT="25400" marB="25400" anchor="ctr">
                     <a:solidFill>
                       <a:srgbClr val="FFFFFF"/>
                     </a:solidFill>
@@ -5072,26 +5039,26 @@
                     <a:lstStyle/>
                     <a:p>
                       <a:r>
-                        <a:rPr sz="1000" b="0">
+                        <a:rPr sz="1600" b="0">
                           <a:solidFill>
                             <a:srgbClr val="222222"/>
                           </a:solidFill>
-                          <a:latin typeface="游ゴシック"/>
-                          <a:ea typeface="游ゴシック"/>
-                          <a:cs typeface="游ゴシック"/>
+                          <a:latin typeface="Meiryo"/>
+                          <a:ea typeface="メイリオ"/>
+                          <a:cs typeface="メイリオ"/>
                         </a:rPr>
-                        <a:t>大綱で「さまざまな家庭環境で育つ子への支援」新設。不登校等増</a:t>
+                        <a:t>大綱「さまざまな家庭環境で育つ子への支援」新設。不登校等増</a:t>
                       </a:r>
                     </a:p>
                   </a:txBody>
-                  <a:tcPr marL="50800" marR="50800" marT="12700" marB="12700" anchor="ctr">
+                  <a:tcPr marL="76200" marR="76200" marT="25400" marB="25400" anchor="ctr">
                     <a:solidFill>
                       <a:srgbClr val="FFFFFF"/>
                     </a:solidFill>
                   </a:tcPr>
                 </a:tc>
               </a:tr>
-              <a:tr h="548640">
+              <a:tr h="822960">
                 <a:tc>
                   <a:txBody>
                     <a:bodyPr wrap="square"/>
@@ -5099,19 +5066,19 @@
                     <a:p>
                       <a:pPr algn="ctr"/>
                       <a:r>
-                        <a:rPr sz="1100" b="1">
+                        <a:rPr sz="1500" b="1">
                           <a:solidFill>
                             <a:srgbClr val="C00000"/>
                           </a:solidFill>
-                          <a:latin typeface="游ゴシック"/>
-                          <a:ea typeface="游ゴシック"/>
-                          <a:cs typeface="游ゴシック"/>
+                          <a:latin typeface="Meiryo"/>
+                          <a:ea typeface="メイリオ"/>
+                          <a:cs typeface="メイリオ"/>
                         </a:rPr>
                         <a:t>新規</a:t>
                       </a:r>
                     </a:p>
                   </a:txBody>
-                  <a:tcPr marL="50800" marR="50800" marT="12700" marB="12700" anchor="ctr">
+                  <a:tcPr marL="76200" marR="76200" marT="25400" marB="25400" anchor="ctr">
                     <a:solidFill>
                       <a:srgbClr val="F2F8EE"/>
                     </a:solidFill>
@@ -5123,19 +5090,19 @@
                     <a:lstStyle/>
                     <a:p>
                       <a:r>
-                        <a:rPr sz="1050" b="0">
+                        <a:rPr sz="1600" b="0">
                           <a:solidFill>
                             <a:srgbClr val="222222"/>
                           </a:solidFill>
-                          <a:latin typeface="游ゴシック"/>
-                          <a:ea typeface="游ゴシック"/>
-                          <a:cs typeface="游ゴシック"/>
+                          <a:latin typeface="Meiryo"/>
+                          <a:ea typeface="メイリオ"/>
+                          <a:cs typeface="メイリオ"/>
                         </a:rPr>
-                        <a:t>ビジョン（端末配備完了）</a:t>
+                        <a:t>ビジョン／基本計画</a:t>
                       </a:r>
                     </a:p>
                   </a:txBody>
-                  <a:tcPr marL="50800" marR="50800" marT="12700" marB="12700" anchor="ctr">
+                  <a:tcPr marL="76200" marR="76200" marT="25400" marB="25400" anchor="ctr">
                     <a:solidFill>
                       <a:srgbClr val="F2F8EE"/>
                     </a:solidFill>
@@ -5147,30 +5114,30 @@
                     <a:lstStyle/>
                     <a:p>
                       <a:r>
-                        <a:rPr sz="1000" b="0">
+                        <a:rPr sz="1600" b="0">
                           <a:solidFill>
                             <a:srgbClr val="222222"/>
                           </a:solidFill>
-                          <a:latin typeface="游ゴシック"/>
-                          <a:ea typeface="游ゴシック"/>
-                          <a:cs typeface="游ゴシック"/>
+                          <a:latin typeface="Meiryo"/>
+                          <a:ea typeface="メイリオ"/>
+                          <a:cs typeface="メイリオ"/>
                         </a:rPr>
-                        <a:t>ICT毎日活用＋</a:t>
+                        <a:t>ICT毎日活用・情報モラル全学年、</a:t>
                       </a:r>
                       <a:r>
-                        <a:rPr sz="1000" b="1">
+                        <a:rPr sz="1600" b="1">
                           <a:solidFill>
                             <a:srgbClr val="C00000"/>
                           </a:solidFill>
-                          <a:latin typeface="游ゴシック"/>
-                          <a:ea typeface="游ゴシック"/>
-                          <a:cs typeface="游ゴシック"/>
+                          <a:latin typeface="Meiryo"/>
+                          <a:ea typeface="メイリオ"/>
+                          <a:cs typeface="メイリオ"/>
                         </a:rPr>
-                        <a:t>情報モラル教育を全学年</a:t>
+                        <a:t>CS拡充・エデュケーション・アシスタント</a:t>
                       </a:r>
                     </a:p>
                   </a:txBody>
-                  <a:tcPr marL="50800" marR="50800" marT="12700" marB="12700" anchor="ctr">
+                  <a:tcPr marL="76200" marR="76200" marT="25400" marB="25400" anchor="ctr">
                     <a:solidFill>
                       <a:srgbClr val="F2F8EE"/>
                     </a:solidFill>
@@ -5182,26 +5149,26 @@
                     <a:lstStyle/>
                     <a:p>
                       <a:r>
-                        <a:rPr sz="1000" b="0">
+                        <a:rPr sz="1600" b="0">
                           <a:solidFill>
                             <a:srgbClr val="222222"/>
                           </a:solidFill>
-                          <a:latin typeface="游ゴシック"/>
-                          <a:ea typeface="游ゴシック"/>
-                          <a:cs typeface="游ゴシック"/>
+                          <a:latin typeface="Meiryo"/>
+                          <a:ea typeface="メイリオ"/>
+                          <a:cs typeface="メイリオ"/>
                         </a:rPr>
-                        <a:t>端末定着の段階認識。適正利用（SNS練馬区ルール）</a:t>
+                        <a:t>端末定着の段階認識。地域協働・働き方改革</a:t>
                       </a:r>
                     </a:p>
                   </a:txBody>
-                  <a:tcPr marL="50800" marR="50800" marT="12700" marB="12700" anchor="ctr">
+                  <a:tcPr marL="76200" marR="76200" marT="25400" marB="25400" anchor="ctr">
                     <a:solidFill>
                       <a:srgbClr val="F2F8EE"/>
                     </a:solidFill>
                   </a:tcPr>
                 </a:tc>
               </a:tr>
-              <a:tr h="548640">
+              <a:tr h="822960">
                 <a:tc>
                   <a:txBody>
                     <a:bodyPr wrap="square"/>
@@ -5209,19 +5176,19 @@
                     <a:p>
                       <a:pPr algn="ctr"/>
                       <a:r>
-                        <a:rPr sz="1100" b="1">
+                        <a:rPr sz="1500" b="1">
                           <a:solidFill>
-                            <a:srgbClr val="C00000"/>
+                            <a:srgbClr val="1F4E79"/>
                           </a:solidFill>
-                          <a:latin typeface="游ゴシック"/>
-                          <a:ea typeface="游ゴシック"/>
-                          <a:cs typeface="游ゴシック"/>
+                          <a:latin typeface="Meiryo"/>
+                          <a:ea typeface="メイリオ"/>
+                          <a:cs typeface="メイリオ"/>
                         </a:rPr>
-                        <a:t>新規</a:t>
+                        <a:t>内容・実務</a:t>
                       </a:r>
                     </a:p>
                   </a:txBody>
-                  <a:tcPr marL="50800" marR="50800" marT="12700" marB="12700" anchor="ctr">
+                  <a:tcPr marL="76200" marR="76200" marT="25400" marB="25400" anchor="ctr">
                     <a:solidFill>
                       <a:srgbClr val="FFFFFF"/>
                     </a:solidFill>
@@ -5233,19 +5200,19 @@
                     <a:lstStyle/>
                     <a:p>
                       <a:r>
-                        <a:rPr sz="1050" b="0">
+                        <a:rPr sz="1600" b="0">
                           <a:solidFill>
                             <a:srgbClr val="222222"/>
                           </a:solidFill>
-                          <a:latin typeface="游ゴシック"/>
-                          <a:ea typeface="游ゴシック"/>
-                          <a:cs typeface="游ゴシック"/>
+                          <a:latin typeface="Meiryo"/>
+                          <a:ea typeface="メイリオ"/>
+                          <a:cs typeface="メイリオ"/>
                         </a:rPr>
-                        <a:t>基本計画（地域協働）／働き方改革</a:t>
+                        <a:t>版比較（第５→第９版）／検討記録</a:t>
                       </a:r>
                     </a:p>
                   </a:txBody>
-                  <a:tcPr marL="50800" marR="50800" marT="12700" marB="12700" anchor="ctr">
+                  <a:tcPr marL="76200" marR="76200" marT="25400" marB="25400" anchor="ctr">
                     <a:solidFill>
                       <a:srgbClr val="FFFFFF"/>
                     </a:solidFill>
@@ -5257,41 +5224,41 @@
                     <a:lstStyle/>
                     <a:p>
                       <a:r>
-                        <a:rPr sz="1000" b="1">
-                          <a:solidFill>
-                            <a:srgbClr val="C00000"/>
-                          </a:solidFill>
-                          <a:latin typeface="游ゴシック"/>
-                          <a:ea typeface="游ゴシック"/>
-                          <a:cs typeface="游ゴシック"/>
-                        </a:rPr>
-                        <a:t>CS導入校拡充</a:t>
-                      </a:r>
-                      <a:r>
-                        <a:rPr sz="1000" b="0">
+                        <a:rPr sz="1600" b="0">
                           <a:solidFill>
                             <a:srgbClr val="222222"/>
                           </a:solidFill>
-                          <a:latin typeface="游ゴシック"/>
-                          <a:ea typeface="游ゴシック"/>
-                          <a:cs typeface="游ゴシック"/>
+                          <a:latin typeface="Meiryo"/>
+                          <a:ea typeface="メイリオ"/>
+                          <a:cs typeface="メイリオ"/>
                         </a:rPr>
-                        <a:t>・</a:t>
+                        <a:t>編成の根拠を</a:t>
                       </a:r>
                       <a:r>
-                        <a:rPr sz="1000" b="1">
+                        <a:rPr sz="1600" b="1">
                           <a:solidFill>
-                            <a:srgbClr val="C00000"/>
+                            <a:srgbClr val="2E7D46"/>
                           </a:solidFill>
-                          <a:latin typeface="游ゴシック"/>
-                          <a:ea typeface="游ゴシック"/>
-                          <a:cs typeface="游ゴシック"/>
+                          <a:latin typeface="Meiryo"/>
+                          <a:ea typeface="メイリオ"/>
+                          <a:cs typeface="メイリオ"/>
                         </a:rPr>
-                        <a:t>エデュケーション・アシスタント</a:t>
+                        <a:t>「Ｒ８主要施策(案)」に変更</a:t>
+                      </a:r>
+                      <a:r>
+                        <a:rPr sz="1600" b="0">
+                          <a:solidFill>
+                            <a:srgbClr val="222222"/>
+                          </a:solidFill>
+                          <a:latin typeface="Meiryo"/>
+                          <a:ea typeface="メイリオ"/>
+                          <a:cs typeface="メイリオ"/>
+                        </a:rPr>
+                        <a:t>、情報モラルを生徒指導の項へ移動 等</a:t>
                       </a:r>
                     </a:p>
                   </a:txBody>
-                  <a:tcPr marL="50800" marR="50800" marT="12700" marB="12700" anchor="ctr">
+                  <a:tcPr marL="76200" marR="76200" marT="25400" marB="25400" anchor="ctr">
                     <a:solidFill>
                       <a:srgbClr val="FFFFFF"/>
                     </a:solidFill>
@@ -5303,373 +5270,21 @@
                     <a:lstStyle/>
                     <a:p>
                       <a:r>
-                        <a:rPr sz="1000" b="0">
+                        <a:rPr sz="1600" b="0">
                           <a:solidFill>
                             <a:srgbClr val="222222"/>
                           </a:solidFill>
-                          <a:latin typeface="游ゴシック"/>
-                          <a:ea typeface="游ゴシック"/>
-                          <a:cs typeface="游ゴシック"/>
+                          <a:latin typeface="Meiryo"/>
+                          <a:ea typeface="メイリオ"/>
+                          <a:cs typeface="メイリオ"/>
                         </a:rPr>
-                        <a:t>大綱「家庭・地域と協働した学校運営」。担い手・負担軽減</a:t>
+                        <a:t>主要施策を先に固める筋道（一次証跡で確認）</a:t>
                       </a:r>
                     </a:p>
                   </a:txBody>
-                  <a:tcPr marL="50800" marR="50800" marT="12700" marB="12700" anchor="ctr">
+                  <a:tcPr marL="76200" marR="76200" marT="25400" marB="25400" anchor="ctr">
                     <a:solidFill>
                       <a:srgbClr val="FFFFFF"/>
-                    </a:solidFill>
-                  </a:tcPr>
-                </a:tc>
-              </a:tr>
-              <a:tr h="548640">
-                <a:tc>
-                  <a:txBody>
-                    <a:bodyPr wrap="square"/>
-                    <a:lstStyle/>
-                    <a:p>
-                      <a:pPr algn="ctr"/>
-                      <a:r>
-                        <a:rPr sz="1100" b="1">
-                          <a:solidFill>
-                            <a:srgbClr val="1F4E79"/>
-                          </a:solidFill>
-                          <a:latin typeface="游ゴシック"/>
-                          <a:ea typeface="游ゴシック"/>
-                          <a:cs typeface="游ゴシック"/>
-                        </a:rPr>
-                        <a:t>内容</a:t>
-                      </a:r>
-                    </a:p>
-                  </a:txBody>
-                  <a:tcPr marL="50800" marR="50800" marT="12700" marB="12700" anchor="ctr">
-                    <a:solidFill>
-                      <a:srgbClr val="F2F8EE"/>
-                    </a:solidFill>
-                  </a:tcPr>
-                </a:tc>
-                <a:tc>
-                  <a:txBody>
-                    <a:bodyPr wrap="square"/>
-                    <a:lstStyle/>
-                    <a:p>
-                      <a:r>
-                        <a:rPr sz="1050" b="0">
-                          <a:solidFill>
-                            <a:srgbClr val="222222"/>
-                          </a:solidFill>
-                          <a:latin typeface="游ゴシック"/>
-                          <a:ea typeface="游ゴシック"/>
-                          <a:cs typeface="游ゴシック"/>
-                        </a:rPr>
-                        <a:t>課長指示／版比較</a:t>
-                      </a:r>
-                    </a:p>
-                  </a:txBody>
-                  <a:tcPr marL="50800" marR="50800" marT="12700" marB="12700" anchor="ctr">
-                    <a:solidFill>
-                      <a:srgbClr val="F2F8EE"/>
-                    </a:solidFill>
-                  </a:tcPr>
-                </a:tc>
-                <a:tc>
-                  <a:txBody>
-                    <a:bodyPr wrap="square"/>
-                    <a:lstStyle/>
-                    <a:p>
-                      <a:r>
-                        <a:rPr sz="1000" b="0">
-                          <a:solidFill>
-                            <a:srgbClr val="222222"/>
-                          </a:solidFill>
-                          <a:latin typeface="游ゴシック"/>
-                          <a:ea typeface="游ゴシック"/>
-                          <a:cs typeface="游ゴシック"/>
-                        </a:rPr>
-                        <a:t>編成の根拠を</a:t>
-                      </a:r>
-                      <a:r>
-                        <a:rPr sz="1000" b="1">
-                          <a:solidFill>
-                            <a:srgbClr val="2E7D46"/>
-                          </a:solidFill>
-                          <a:latin typeface="游ゴシック"/>
-                          <a:ea typeface="游ゴシック"/>
-                          <a:cs typeface="游ゴシック"/>
-                        </a:rPr>
-                        <a:t>「Ｒ７重点課題」→「Ｒ８主要施策(案)」</a:t>
-                      </a:r>
-                      <a:r>
-                        <a:rPr sz="1000" b="0">
-                          <a:solidFill>
-                            <a:srgbClr val="222222"/>
-                          </a:solidFill>
-                          <a:latin typeface="游ゴシック"/>
-                          <a:ea typeface="游ゴシック"/>
-                          <a:cs typeface="游ゴシック"/>
-                        </a:rPr>
-                        <a:t>に変更</a:t>
-                      </a:r>
-                    </a:p>
-                  </a:txBody>
-                  <a:tcPr marL="50800" marR="50800" marT="12700" marB="12700" anchor="ctr">
-                    <a:solidFill>
-                      <a:srgbClr val="F2F8EE"/>
-                    </a:solidFill>
-                  </a:tcPr>
-                </a:tc>
-                <a:tc>
-                  <a:txBody>
-                    <a:bodyPr wrap="square"/>
-                    <a:lstStyle/>
-                    <a:p>
-                      <a:r>
-                        <a:rPr sz="1000" b="0">
-                          <a:solidFill>
-                            <a:srgbClr val="222222"/>
-                          </a:solidFill>
-                          <a:latin typeface="游ゴシック"/>
-                          <a:ea typeface="游ゴシック"/>
-                          <a:cs typeface="游ゴシック"/>
-                        </a:rPr>
-                        <a:t>主要施策を先に固め、それに基づき各校が編成する筋道</a:t>
-                      </a:r>
-                    </a:p>
-                  </a:txBody>
-                  <a:tcPr marL="50800" marR="50800" marT="12700" marB="12700" anchor="ctr">
-                    <a:solidFill>
-                      <a:srgbClr val="F2F8EE"/>
-                    </a:solidFill>
-                  </a:tcPr>
-                </a:tc>
-              </a:tr>
-              <a:tr h="548640">
-                <a:tc>
-                  <a:txBody>
-                    <a:bodyPr wrap="square"/>
-                    <a:lstStyle/>
-                    <a:p>
-                      <a:pPr algn="ctr"/>
-                      <a:r>
-                        <a:rPr sz="1100" b="1">
-                          <a:solidFill>
-                            <a:srgbClr val="1F4E79"/>
-                          </a:solidFill>
-                          <a:latin typeface="游ゴシック"/>
-                          <a:ea typeface="游ゴシック"/>
-                          <a:cs typeface="游ゴシック"/>
-                        </a:rPr>
-                        <a:t>内容</a:t>
-                      </a:r>
-                    </a:p>
-                  </a:txBody>
-                  <a:tcPr marL="50800" marR="50800" marT="12700" marB="12700" anchor="ctr">
-                    <a:solidFill>
-                      <a:srgbClr val="FFFFFF"/>
-                    </a:solidFill>
-                  </a:tcPr>
-                </a:tc>
-                <a:tc>
-                  <a:txBody>
-                    <a:bodyPr wrap="square"/>
-                    <a:lstStyle/>
-                    <a:p>
-                      <a:r>
-                        <a:rPr sz="1050" b="0">
-                          <a:solidFill>
-                            <a:srgbClr val="222222"/>
-                          </a:solidFill>
-                          <a:latin typeface="游ゴシック"/>
-                          <a:ea typeface="游ゴシック"/>
-                          <a:cs typeface="游ゴシック"/>
-                        </a:rPr>
-                        <a:t>第５版→第９版の版比較（一次証跡）</a:t>
-                      </a:r>
-                    </a:p>
-                  </a:txBody>
-                  <a:tcPr marL="50800" marR="50800" marT="12700" marB="12700" anchor="ctr">
-                    <a:solidFill>
-                      <a:srgbClr val="FFFFFF"/>
-                    </a:solidFill>
-                  </a:tcPr>
-                </a:tc>
-                <a:tc>
-                  <a:txBody>
-                    <a:bodyPr wrap="square"/>
-                    <a:lstStyle/>
-                    <a:p>
-                      <a:r>
-                        <a:rPr sz="1000" b="0">
-                          <a:solidFill>
-                            <a:srgbClr val="222222"/>
-                          </a:solidFill>
-                          <a:latin typeface="游ゴシック"/>
-                          <a:ea typeface="游ゴシック"/>
-                          <a:cs typeface="游ゴシック"/>
-                        </a:rPr>
-                        <a:t>情報モラルを</a:t>
-                      </a:r>
-                      <a:r>
-                        <a:rPr sz="1000" b="1">
-                          <a:solidFill>
-                            <a:srgbClr val="2E7D46"/>
-                          </a:solidFill>
-                          <a:latin typeface="游ゴシック"/>
-                          <a:ea typeface="游ゴシック"/>
-                          <a:cs typeface="游ゴシック"/>
-                        </a:rPr>
-                        <a:t>ICT教育の項→いじめ・命を大切にする教育の項へ移動</a:t>
-                      </a:r>
-                    </a:p>
-                  </a:txBody>
-                  <a:tcPr marL="50800" marR="50800" marT="12700" marB="12700" anchor="ctr">
-                    <a:solidFill>
-                      <a:srgbClr val="FFFFFF"/>
-                    </a:solidFill>
-                  </a:tcPr>
-                </a:tc>
-                <a:tc>
-                  <a:txBody>
-                    <a:bodyPr wrap="square"/>
-                    <a:lstStyle/>
-                    <a:p>
-                      <a:r>
-                        <a:rPr sz="1000" b="0">
-                          <a:solidFill>
-                            <a:srgbClr val="222222"/>
-                          </a:solidFill>
-                          <a:latin typeface="游ゴシック"/>
-                          <a:ea typeface="游ゴシック"/>
-                          <a:cs typeface="游ゴシック"/>
-                        </a:rPr>
-                        <a:t>「技術」でなく「生徒指導・命」の文脈に位置づけ直し</a:t>
-                      </a:r>
-                    </a:p>
-                  </a:txBody>
-                  <a:tcPr marL="50800" marR="50800" marT="12700" marB="12700" anchor="ctr">
-                    <a:solidFill>
-                      <a:srgbClr val="FFFFFF"/>
-                    </a:solidFill>
-                  </a:tcPr>
-                </a:tc>
-              </a:tr>
-              <a:tr h="548640">
-                <a:tc>
-                  <a:txBody>
-                    <a:bodyPr wrap="square"/>
-                    <a:lstStyle/>
-                    <a:p>
-                      <a:pPr algn="ctr"/>
-                      <a:r>
-                        <a:rPr sz="1100" b="1">
-                          <a:solidFill>
-                            <a:srgbClr val="555555"/>
-                          </a:solidFill>
-                          <a:latin typeface="游ゴシック"/>
-                          <a:ea typeface="游ゴシック"/>
-                          <a:cs typeface="游ゴシック"/>
-                        </a:rPr>
-                        <a:t>実務</a:t>
-                      </a:r>
-                    </a:p>
-                  </a:txBody>
-                  <a:tcPr marL="50800" marR="50800" marT="12700" marB="12700" anchor="ctr">
-                    <a:solidFill>
-                      <a:srgbClr val="F2F8EE"/>
-                    </a:solidFill>
-                  </a:tcPr>
-                </a:tc>
-                <a:tc>
-                  <a:txBody>
-                    <a:bodyPr wrap="square"/>
-                    <a:lstStyle/>
-                    <a:p>
-                      <a:r>
-                        <a:rPr sz="1050" b="0">
-                          <a:solidFill>
-                            <a:srgbClr val="222222"/>
-                          </a:solidFill>
-                          <a:latin typeface="游ゴシック"/>
-                          <a:ea typeface="游ゴシック"/>
-                          <a:cs typeface="游ゴシック"/>
-                        </a:rPr>
-                        <a:t>検討記録</a:t>
-                      </a:r>
-                    </a:p>
-                  </a:txBody>
-                  <a:tcPr marL="50800" marR="50800" marT="12700" marB="12700" anchor="ctr">
-                    <a:solidFill>
-                      <a:srgbClr val="F2F8EE"/>
-                    </a:solidFill>
-                  </a:tcPr>
-                </a:tc>
-                <a:tc>
-                  <a:txBody>
-                    <a:bodyPr wrap="square"/>
-                    <a:lstStyle/>
-                    <a:p>
-                      <a:r>
-                        <a:rPr sz="1000" b="0">
-                          <a:solidFill>
-                            <a:srgbClr val="222222"/>
-                          </a:solidFill>
-                          <a:latin typeface="游ゴシック"/>
-                          <a:ea typeface="游ゴシック"/>
-                          <a:cs typeface="游ゴシック"/>
-                        </a:rPr>
-                        <a:t>土曜授業の年間設定</a:t>
-                      </a:r>
-                      <a:r>
-                        <a:rPr sz="1000" b="0">
-                          <a:solidFill>
-                            <a:srgbClr val="222222"/>
-                          </a:solidFill>
-                          <a:latin typeface="游ゴシック"/>
-                          <a:ea typeface="游ゴシック"/>
-                          <a:cs typeface="游ゴシック"/>
-                        </a:rPr>
-                        <a:t>・</a:t>
-                      </a:r>
-                      <a:r>
-                        <a:rPr sz="1000" b="0">
-                          <a:solidFill>
-                            <a:srgbClr val="222222"/>
-                          </a:solidFill>
-                          <a:latin typeface="游ゴシック"/>
-                          <a:ea typeface="游ゴシック"/>
-                          <a:cs typeface="游ゴシック"/>
-                        </a:rPr>
-                        <a:t>文書の電子化（公印省略・割印見直し）</a:t>
-                      </a:r>
-                    </a:p>
-                  </a:txBody>
-                  <a:tcPr marL="50800" marR="50800" marT="12700" marB="12700" anchor="ctr">
-                    <a:solidFill>
-                      <a:srgbClr val="F2F8EE"/>
-                    </a:solidFill>
-                  </a:tcPr>
-                </a:tc>
-                <a:tc>
-                  <a:txBody>
-                    <a:bodyPr wrap="square"/>
-                    <a:lstStyle/>
-                    <a:p>
-                      <a:r>
-                        <a:rPr sz="1000" b="0">
-                          <a:solidFill>
-                            <a:srgbClr val="222222"/>
-                          </a:solidFill>
-                          <a:latin typeface="游ゴシック"/>
-                          <a:ea typeface="游ゴシック"/>
-                          <a:cs typeface="游ゴシック"/>
-                        </a:rPr>
-                        <a:t>参観機会の確保／電子起案を生かした働き方改革</a:t>
-                      </a:r>
-                    </a:p>
-                  </a:txBody>
-                  <a:tcPr marL="50800" marR="50800" marT="12700" marB="12700" anchor="ctr">
-                    <a:solidFill>
-                      <a:srgbClr val="F2F8EE"/>
                     </a:solidFill>
                   </a:tcPr>
                 </a:tc>
@@ -5748,8 +5363,8 @@
         </p:nvSpPr>
         <p:spPr>
           <a:xfrm>
-            <a:off x="320040" y="54864"/>
-            <a:ext cx="11521440" cy="731520"/>
+            <a:off x="320040" y="45720"/>
+            <a:ext cx="11521440" cy="749808"/>
           </a:xfrm>
           <a:prstGeom prst="rect">
             <a:avLst/>
@@ -5757,19 +5372,19 @@
           <a:noFill/>
         </p:spPr>
         <p:txBody>
-          <a:bodyPr wrap="square" anchor="ctr" lIns="63500" rIns="63500" tIns="25400" bIns="25400">
+          <a:bodyPr wrap="square" anchor="ctr" lIns="76200" rIns="76200" tIns="25400" bIns="25400">
             <a:spAutoFit/>
           </a:bodyPr>
           <a:lstStyle/>
           <a:p>
             <a:r>
-              <a:rPr sz="2500" b="1">
+              <a:rPr sz="2400" b="1">
                 <a:solidFill>
                   <a:srgbClr val="FFFFFF"/>
                 </a:solidFill>
-                <a:latin typeface="游ゴシック"/>
-                <a:ea typeface="游ゴシック"/>
-                <a:cs typeface="游ゴシック"/>
+                <a:latin typeface="Meiryo"/>
+                <a:ea typeface="メイリオ"/>
+                <a:cs typeface="メイリオ"/>
               </a:rPr>
               <a:t>変更のねらいと 令和９年度への申し送り</a:t>
             </a:r>
@@ -5785,7 +5400,7 @@
         <p:spPr>
           <a:xfrm>
             <a:off x="0" y="841248"/>
-            <a:ext cx="12191695" cy="420624"/>
+            <a:ext cx="12191695" cy="438912"/>
           </a:xfrm>
           <a:prstGeom prst="rect">
             <a:avLst/>
@@ -5829,7 +5444,7 @@
         <p:spPr>
           <a:xfrm>
             <a:off x="320040" y="850392"/>
-            <a:ext cx="11521440" cy="402336"/>
+            <a:ext cx="11521440" cy="420624"/>
           </a:xfrm>
           <a:prstGeom prst="rect">
             <a:avLst/>
@@ -5837,19 +5452,19 @@
           <a:noFill/>
         </p:spPr>
         <p:txBody>
-          <a:bodyPr wrap="square" anchor="ctr" lIns="63500" rIns="63500" tIns="25400" bIns="25400">
+          <a:bodyPr wrap="square" anchor="ctr" lIns="76200" rIns="76200" tIns="25400" bIns="25400">
             <a:spAutoFit/>
           </a:bodyPr>
           <a:lstStyle/>
           <a:p>
             <a:r>
-              <a:rPr sz="1350" b="1">
+              <a:rPr sz="1600" b="1">
                 <a:solidFill>
                   <a:srgbClr val="FFFFFF"/>
                 </a:solidFill>
-                <a:latin typeface="游ゴシック"/>
-                <a:ea typeface="游ゴシック"/>
-                <a:cs typeface="游ゴシック"/>
+                <a:latin typeface="Meiryo"/>
+                <a:ea typeface="メイリオ"/>
+                <a:cs typeface="メイリオ"/>
               </a:rPr>
               <a:t>同じ論理で令和９年度を組み立てるための相談論点</a:t>
             </a:r>
@@ -5864,8 +5479,8 @@
         </p:nvSpPr>
         <p:spPr>
           <a:xfrm>
-            <a:off x="320040" y="1417320"/>
-            <a:ext cx="5623560" cy="384048"/>
+            <a:off x="320040" y="1389888"/>
+            <a:ext cx="5623560" cy="420624"/>
           </a:xfrm>
           <a:prstGeom prst="rect">
             <a:avLst/>
@@ -5908,8 +5523,8 @@
         </p:nvSpPr>
         <p:spPr>
           <a:xfrm>
-            <a:off x="374904" y="1417320"/>
-            <a:ext cx="5532120" cy="384048"/>
+            <a:off x="393192" y="1389888"/>
+            <a:ext cx="5513832" cy="420624"/>
           </a:xfrm>
           <a:prstGeom prst="rect">
             <a:avLst/>
@@ -5917,19 +5532,19 @@
           <a:noFill/>
         </p:spPr>
         <p:txBody>
-          <a:bodyPr wrap="square" anchor="ctr" lIns="63500" rIns="63500" tIns="25400" bIns="25400">
+          <a:bodyPr wrap="square" anchor="ctr" lIns="76200" rIns="76200" tIns="25400" bIns="25400">
             <a:spAutoFit/>
           </a:bodyPr>
           <a:lstStyle/>
           <a:p>
             <a:r>
-              <a:rPr sz="1400" b="1">
+              <a:rPr sz="1800" b="1">
                 <a:solidFill>
                   <a:srgbClr val="1E4620"/>
                 </a:solidFill>
-                <a:latin typeface="游ゴシック"/>
-                <a:ea typeface="游ゴシック"/>
-                <a:cs typeface="游ゴシック"/>
+                <a:latin typeface="Meiryo"/>
+                <a:ea typeface="メイリオ"/>
+                <a:cs typeface="メイリオ"/>
               </a:rPr>
               <a:t>■ 変更の３つのねらい（Ｒ８）</a:t>
             </a:r>
@@ -5944,8 +5559,8 @@
         </p:nvSpPr>
         <p:spPr>
           <a:xfrm>
-            <a:off x="457200" y="1892807"/>
-            <a:ext cx="5349240" cy="960120"/>
+            <a:off x="457200" y="1956816"/>
+            <a:ext cx="5394960" cy="1170432"/>
           </a:xfrm>
           <a:prstGeom prst="roundRect">
             <a:avLst>
@@ -5992,8 +5607,8 @@
         </p:nvSpPr>
         <p:spPr>
           <a:xfrm>
-            <a:off x="594360" y="1938527"/>
-            <a:ext cx="5120640" cy="896112"/>
+            <a:off x="621792" y="2011680"/>
+            <a:ext cx="5120640" cy="1097280"/>
           </a:xfrm>
           <a:prstGeom prst="rect">
             <a:avLst/>
@@ -6001,32 +5616,32 @@
           <a:noFill/>
         </p:spPr>
         <p:txBody>
-          <a:bodyPr wrap="square" anchor="ctr" lIns="63500" rIns="63500" tIns="25400" bIns="25400">
+          <a:bodyPr wrap="square" anchor="ctr" lIns="76200" rIns="76200" tIns="25400" bIns="25400">
             <a:spAutoFit/>
           </a:bodyPr>
           <a:lstStyle/>
           <a:p>
             <a:r>
-              <a:rPr sz="1300" b="1">
+              <a:rPr sz="1800" b="1">
                 <a:solidFill>
                   <a:srgbClr val="2E7D46"/>
                 </a:solidFill>
-                <a:latin typeface="游ゴシック"/>
-                <a:ea typeface="游ゴシック"/>
-                <a:cs typeface="游ゴシック"/>
+                <a:latin typeface="Meiryo"/>
+                <a:ea typeface="メイリオ"/>
+                <a:cs typeface="メイリオ"/>
               </a:rPr>
               <a:t>1. 視点の絞り込み</a:t>
             </a:r>
           </a:p>
           <a:p>
             <a:r>
-              <a:rPr sz="1150" b="0">
+              <a:rPr sz="1600" b="0">
                 <a:solidFill>
                   <a:srgbClr val="222222"/>
                 </a:solidFill>
-                <a:latin typeface="游ゴシック"/>
-                <a:ea typeface="游ゴシック"/>
-                <a:cs typeface="游ゴシック"/>
+                <a:latin typeface="Meiryo"/>
+                <a:ea typeface="メイリオ"/>
+                <a:cs typeface="メイリオ"/>
               </a:rPr>
               <a:t>上位計画の３視点に整理し筋を通す</a:t>
             </a:r>
@@ -6041,8 +5656,8 @@
         </p:nvSpPr>
         <p:spPr>
           <a:xfrm>
-            <a:off x="457200" y="2990087"/>
-            <a:ext cx="5349240" cy="960120"/>
+            <a:off x="457200" y="3273552"/>
+            <a:ext cx="5394960" cy="1170432"/>
           </a:xfrm>
           <a:prstGeom prst="roundRect">
             <a:avLst>
@@ -6089,8 +5704,8 @@
         </p:nvSpPr>
         <p:spPr>
           <a:xfrm>
-            <a:off x="594360" y="3035807"/>
-            <a:ext cx="5120640" cy="896112"/>
+            <a:off x="621792" y="3328416"/>
+            <a:ext cx="5120640" cy="1097280"/>
           </a:xfrm>
           <a:prstGeom prst="rect">
             <a:avLst/>
@@ -6098,32 +5713,32 @@
           <a:noFill/>
         </p:spPr>
         <p:txBody>
-          <a:bodyPr wrap="square" anchor="ctr" lIns="63500" rIns="63500" tIns="25400" bIns="25400">
+          <a:bodyPr wrap="square" anchor="ctr" lIns="76200" rIns="76200" tIns="25400" bIns="25400">
             <a:spAutoFit/>
           </a:bodyPr>
           <a:lstStyle/>
           <a:p>
             <a:r>
-              <a:rPr sz="1300" b="1">
+              <a:rPr sz="1800" b="1">
                 <a:solidFill>
                   <a:srgbClr val="2E7D46"/>
                 </a:solidFill>
-                <a:latin typeface="游ゴシック"/>
-                <a:ea typeface="游ゴシック"/>
-                <a:cs typeface="游ゴシック"/>
+                <a:latin typeface="Meiryo"/>
+                <a:ea typeface="メイリオ"/>
+                <a:cs typeface="メイリオ"/>
               </a:rPr>
               <a:t>2. 見える化</a:t>
             </a:r>
           </a:p>
           <a:p>
             <a:r>
-              <a:rPr sz="1150" b="0">
+              <a:rPr sz="1600" b="0">
                 <a:solidFill>
                   <a:srgbClr val="222222"/>
                 </a:solidFill>
-                <a:latin typeface="游ゴシック"/>
-                <a:ea typeface="游ゴシック"/>
-                <a:cs typeface="游ゴシック"/>
+                <a:latin typeface="Meiryo"/>
+                <a:ea typeface="メイリオ"/>
+                <a:cs typeface="メイリオ"/>
               </a:rPr>
               <a:t>新規・拡充等と区の重点・差分を明示</a:t>
             </a:r>
@@ -6138,8 +5753,8 @@
         </p:nvSpPr>
         <p:spPr>
           <a:xfrm>
-            <a:off x="457200" y="4087368"/>
-            <a:ext cx="5349240" cy="960120"/>
+            <a:off x="457200" y="4590288"/>
+            <a:ext cx="5394960" cy="1170432"/>
           </a:xfrm>
           <a:prstGeom prst="roundRect">
             <a:avLst>
@@ -6186,8 +5801,8 @@
         </p:nvSpPr>
         <p:spPr>
           <a:xfrm>
-            <a:off x="594360" y="4133087"/>
-            <a:ext cx="5120640" cy="896112"/>
+            <a:off x="621792" y="4645151"/>
+            <a:ext cx="5120640" cy="1097280"/>
           </a:xfrm>
           <a:prstGeom prst="rect">
             <a:avLst/>
@@ -6195,32 +5810,32 @@
           <a:noFill/>
         </p:spPr>
         <p:txBody>
-          <a:bodyPr wrap="square" anchor="ctr" lIns="63500" rIns="63500" tIns="25400" bIns="25400">
+          <a:bodyPr wrap="square" anchor="ctr" lIns="76200" rIns="76200" tIns="25400" bIns="25400">
             <a:spAutoFit/>
           </a:bodyPr>
           <a:lstStyle/>
           <a:p>
             <a:r>
-              <a:rPr sz="1300" b="1">
+              <a:rPr sz="1800" b="1">
                 <a:solidFill>
                   <a:srgbClr val="2E7D46"/>
                 </a:solidFill>
-                <a:latin typeface="游ゴシック"/>
-                <a:ea typeface="游ゴシック"/>
-                <a:cs typeface="游ゴシック"/>
+                <a:latin typeface="Meiryo"/>
+                <a:ea typeface="メイリオ"/>
+                <a:cs typeface="メイリオ"/>
               </a:rPr>
               <a:t>3. 支援が必要な子どもの重点化</a:t>
             </a:r>
           </a:p>
           <a:p>
             <a:r>
-              <a:rPr sz="1150" b="0">
+              <a:rPr sz="1600" b="0">
                 <a:solidFill>
                   <a:srgbClr val="222222"/>
                 </a:solidFill>
-                <a:latin typeface="游ゴシック"/>
-                <a:ea typeface="游ゴシック"/>
-                <a:cs typeface="游ゴシック"/>
+                <a:latin typeface="Meiryo"/>
+                <a:ea typeface="メイリオ"/>
+                <a:cs typeface="メイリオ"/>
               </a:rPr>
               <a:t>大綱改定・ビジョンの課題を根拠に</a:t>
             </a:r>
@@ -6235,8 +5850,8 @@
         </p:nvSpPr>
         <p:spPr>
           <a:xfrm>
-            <a:off x="6263640" y="1417320"/>
-            <a:ext cx="5605272" cy="384048"/>
+            <a:off x="6263640" y="1389888"/>
+            <a:ext cx="5605272" cy="420624"/>
           </a:xfrm>
           <a:prstGeom prst="rect">
             <a:avLst/>
@@ -6279,8 +5894,8 @@
         </p:nvSpPr>
         <p:spPr>
           <a:xfrm>
-            <a:off x="6318503" y="1417320"/>
-            <a:ext cx="5513832" cy="384048"/>
+            <a:off x="6336792" y="1389888"/>
+            <a:ext cx="5495544" cy="420624"/>
           </a:xfrm>
           <a:prstGeom prst="rect">
             <a:avLst/>
@@ -6288,19 +5903,19 @@
           <a:noFill/>
         </p:spPr>
         <p:txBody>
-          <a:bodyPr wrap="square" anchor="ctr" lIns="63500" rIns="63500" tIns="25400" bIns="25400">
+          <a:bodyPr wrap="square" anchor="ctr" lIns="76200" rIns="76200" tIns="25400" bIns="25400">
             <a:spAutoFit/>
           </a:bodyPr>
           <a:lstStyle/>
           <a:p>
             <a:r>
-              <a:rPr sz="1400" b="1">
+              <a:rPr sz="1800" b="1">
                 <a:solidFill>
                   <a:srgbClr val="1E4620"/>
                 </a:solidFill>
-                <a:latin typeface="游ゴシック"/>
-                <a:ea typeface="游ゴシック"/>
-                <a:cs typeface="游ゴシック"/>
+                <a:latin typeface="Meiryo"/>
+                <a:ea typeface="メイリオ"/>
+                <a:cs typeface="メイリオ"/>
               </a:rPr>
               <a:t>■ 令和９年度への相談論点</a:t>
             </a:r>
@@ -6315,8 +5930,8 @@
         </p:nvSpPr>
         <p:spPr>
           <a:xfrm>
-            <a:off x="6400800" y="1892807"/>
-            <a:ext cx="5394960" cy="932688"/>
+            <a:off x="6400800" y="1956816"/>
+            <a:ext cx="5440680" cy="1133856"/>
           </a:xfrm>
           <a:prstGeom prst="rect">
             <a:avLst/>
@@ -6324,32 +5939,32 @@
           <a:noFill/>
         </p:spPr>
         <p:txBody>
-          <a:bodyPr wrap="square" anchor="t" lIns="63500" rIns="63500" tIns="25400" bIns="25400">
+          <a:bodyPr wrap="square" anchor="t" lIns="76200" rIns="76200" tIns="25400" bIns="25400">
             <a:spAutoFit/>
           </a:bodyPr>
           <a:lstStyle/>
           <a:p>
             <a:r>
-              <a:rPr sz="1250" b="1">
+              <a:rPr sz="1650" b="1">
                 <a:solidFill>
                   <a:srgbClr val="1F4E79"/>
                 </a:solidFill>
-                <a:latin typeface="游ゴシック"/>
-                <a:ea typeface="游ゴシック"/>
-                <a:cs typeface="游ゴシック"/>
+                <a:latin typeface="Meiryo"/>
+                <a:ea typeface="メイリオ"/>
+                <a:cs typeface="メイリオ"/>
               </a:rPr>
               <a:t>① 次期計画への接続</a:t>
             </a:r>
           </a:p>
           <a:p>
             <a:r>
-              <a:rPr sz="1100" b="0">
+              <a:rPr sz="1550" b="0">
                 <a:solidFill>
                   <a:srgbClr val="222222"/>
                 </a:solidFill>
-                <a:latin typeface="游ゴシック"/>
-                <a:ea typeface="游ゴシック"/>
-                <a:cs typeface="游ゴシック"/>
+                <a:latin typeface="Meiryo"/>
+                <a:ea typeface="メイリオ"/>
+                <a:cs typeface="メイリオ"/>
               </a:rPr>
               <a:t>基本計画（令和４～８年度）が令和８年度で期間終了。次期計画の方向性と整合</a:t>
             </a:r>
@@ -6364,8 +5979,8 @@
         </p:nvSpPr>
         <p:spPr>
           <a:xfrm>
-            <a:off x="6400800" y="2953511"/>
-            <a:ext cx="5394960" cy="932688"/>
+            <a:off x="6400800" y="3145536"/>
+            <a:ext cx="5440680" cy="1133856"/>
           </a:xfrm>
           <a:prstGeom prst="rect">
             <a:avLst/>
@@ -6373,32 +5988,32 @@
           <a:noFill/>
         </p:spPr>
         <p:txBody>
-          <a:bodyPr wrap="square" anchor="t" lIns="63500" rIns="63500" tIns="25400" bIns="25400">
+          <a:bodyPr wrap="square" anchor="t" lIns="76200" rIns="76200" tIns="25400" bIns="25400">
             <a:spAutoFit/>
           </a:bodyPr>
           <a:lstStyle/>
           <a:p>
             <a:r>
-              <a:rPr sz="1250" b="1">
+              <a:rPr sz="1650" b="1">
                 <a:solidFill>
                   <a:srgbClr val="1F4E79"/>
                 </a:solidFill>
-                <a:latin typeface="游ゴシック"/>
-                <a:ea typeface="游ゴシック"/>
-                <a:cs typeface="游ゴシック"/>
+                <a:latin typeface="Meiryo"/>
+                <a:ea typeface="メイリオ"/>
+                <a:cs typeface="メイリオ"/>
               </a:rPr>
               <a:t>② KPIの設定</a:t>
             </a:r>
           </a:p>
           <a:p>
             <a:r>
-              <a:rPr sz="1100" b="0">
+              <a:rPr sz="1550" b="0">
                 <a:solidFill>
                   <a:srgbClr val="222222"/>
                 </a:solidFill>
-                <a:latin typeface="游ゴシック"/>
-                <a:ea typeface="游ゴシック"/>
-                <a:cs typeface="游ゴシック"/>
+                <a:latin typeface="Meiryo"/>
+                <a:ea typeface="メイリオ"/>
+                <a:cs typeface="メイリオ"/>
               </a:rPr>
               <a:t>ビジョン令和10年度末目標から逆算した指標を施策管理で保持するか</a:t>
             </a:r>
@@ -6413,8 +6028,8 @@
         </p:nvSpPr>
         <p:spPr>
           <a:xfrm>
-            <a:off x="6400800" y="4014215"/>
-            <a:ext cx="5394960" cy="932688"/>
+            <a:off x="6400800" y="4334256"/>
+            <a:ext cx="5440680" cy="1133856"/>
           </a:xfrm>
           <a:prstGeom prst="rect">
             <a:avLst/>
@@ -6422,32 +6037,32 @@
           <a:noFill/>
         </p:spPr>
         <p:txBody>
-          <a:bodyPr wrap="square" anchor="t" lIns="63500" rIns="63500" tIns="25400" bIns="25400">
+          <a:bodyPr wrap="square" anchor="t" lIns="76200" rIns="76200" tIns="25400" bIns="25400">
             <a:spAutoFit/>
           </a:bodyPr>
           <a:lstStyle/>
           <a:p>
             <a:r>
-              <a:rPr sz="1250" b="1">
+              <a:rPr sz="1650" b="1">
                 <a:solidFill>
                   <a:srgbClr val="1F4E79"/>
                 </a:solidFill>
-                <a:latin typeface="游ゴシック"/>
-                <a:ea typeface="游ゴシック"/>
-                <a:cs typeface="游ゴシック"/>
+                <a:latin typeface="Meiryo"/>
+                <a:ea typeface="メイリオ"/>
+                <a:cs typeface="メイリオ"/>
               </a:rPr>
               <a:t>③ 文言・目線の整理</a:t>
             </a:r>
           </a:p>
           <a:p>
             <a:r>
-              <a:rPr sz="1100" b="0">
+              <a:rPr sz="1550" b="0">
                 <a:solidFill>
                   <a:srgbClr val="222222"/>
                 </a:solidFill>
-                <a:latin typeface="游ゴシック"/>
-                <a:ea typeface="游ゴシック"/>
-                <a:cs typeface="游ゴシック"/>
+                <a:latin typeface="Meiryo"/>
+                <a:ea typeface="メイリオ"/>
+                <a:cs typeface="メイリオ"/>
               </a:rPr>
               <a:t>学校目線（教育課程＝活用）と委員会目線（施策＝配置）の分離、重点課題５の扱い</a:t>
             </a:r>
@@ -6462,8 +6077,8 @@
         </p:nvSpPr>
         <p:spPr>
           <a:xfrm>
-            <a:off x="6400800" y="5074920"/>
-            <a:ext cx="5394960" cy="932688"/>
+            <a:off x="6400800" y="5522976"/>
+            <a:ext cx="5440680" cy="1133856"/>
           </a:xfrm>
           <a:prstGeom prst="rect">
             <a:avLst/>
@@ -6471,32 +6086,32 @@
           <a:noFill/>
         </p:spPr>
         <p:txBody>
-          <a:bodyPr wrap="square" anchor="t" lIns="63500" rIns="63500" tIns="25400" bIns="25400">
+          <a:bodyPr wrap="square" anchor="t" lIns="76200" rIns="76200" tIns="25400" bIns="25400">
             <a:spAutoFit/>
           </a:bodyPr>
           <a:lstStyle/>
           <a:p>
             <a:r>
-              <a:rPr sz="1250" b="1">
+              <a:rPr sz="1650" b="1">
                 <a:solidFill>
                   <a:srgbClr val="1F4E79"/>
                 </a:solidFill>
-                <a:latin typeface="游ゴシック"/>
-                <a:ea typeface="游ゴシック"/>
-                <a:cs typeface="游ゴシック"/>
+                <a:latin typeface="Meiryo"/>
+                <a:ea typeface="メイリオ"/>
+                <a:cs typeface="メイリオ"/>
               </a:rPr>
               <a:t>④ 環境変化への対応</a:t>
             </a:r>
           </a:p>
           <a:p>
             <a:r>
-              <a:rPr sz="1100" b="0">
+              <a:rPr sz="1550" b="0">
                 <a:solidFill>
                   <a:srgbClr val="222222"/>
                 </a:solidFill>
-                <a:latin typeface="游ゴシック"/>
-                <a:ea typeface="游ゴシック"/>
-                <a:cs typeface="游ゴシック"/>
+                <a:latin typeface="Meiryo"/>
+                <a:ea typeface="メイリオ"/>
+                <a:cs typeface="メイリオ"/>
               </a:rPr>
               <a:t>生成AI活用・NEXT GIGA・多様な学びの場・教員の人材確保の新規位置づけ</a:t>
             </a:r>
@@ -6511,7 +6126,7 @@
         </p:nvSpPr>
         <p:spPr>
           <a:xfrm>
-            <a:off x="457200" y="6355080"/>
+            <a:off x="457200" y="6419088"/>
             <a:ext cx="11338560" cy="365760"/>
           </a:xfrm>
           <a:prstGeom prst="rect">
@@ -6520,19 +6135,19 @@
           <a:noFill/>
         </p:spPr>
         <p:txBody>
-          <a:bodyPr wrap="square" anchor="t" lIns="63500" rIns="63500" tIns="25400" bIns="25400">
+          <a:bodyPr wrap="square" anchor="t" lIns="76200" rIns="76200" tIns="25400" bIns="25400">
             <a:spAutoFit/>
           </a:bodyPr>
           <a:lstStyle/>
           <a:p>
             <a:r>
-              <a:rPr sz="950" b="0">
+              <a:rPr sz="1250" b="0">
                 <a:solidFill>
                   <a:srgbClr val="555555"/>
                 </a:solidFill>
-                <a:latin typeface="游ゴシック"/>
-                <a:ea typeface="游ゴシック"/>
-                <a:cs typeface="游ゴシック"/>
+                <a:latin typeface="Meiryo"/>
+                <a:ea typeface="メイリオ"/>
+                <a:cs typeface="メイリオ"/>
               </a:rPr>
               <a:t>※ ③④の具体案は別途「令和９年度 主要施策素案（Ｒ８の成果と課題から）」で提示済み。本相談で方向性を確認いただきたい。</a:t>
             </a:r>
